--- a/system-design-101/vi/lessons/sd-13-014/slides/sd-13-014.pptx
+++ b/system-design-101/vi/lessons/sd-13-014/slides/sd-13-014.pptx
@@ -7695,7 +7695,7 @@
               <a:buNone/>
             </a:pPr>
             <a:r>
-              <a:rPr lang="en-US" sz="2400" dirty="0" spc="-20" kern="0">
+              <a:rPr lang="en-US" sz="2400" dirty="0" spc="1" kern="0">
                 <a:solidFill>
                   <a:srgbClr val="E4E1D8"/>
                 </a:solidFill>
@@ -7703,10 +7703,10 @@
                 <a:ea typeface="Be Vietnam Pro" pitchFamily="34" charset="-122"/>
                 <a:cs typeface="Be Vietnam Pro" pitchFamily="34" charset="-120"/>
               </a:rPr>
-              <a:t>Runner</a:t>
-            </a:r>
-            <a:r>
-              <a:rPr lang="en-US" sz="2400" dirty="0" spc="-11" kern="0">
+              <a:t>Thứ</a:t>
+            </a:r>
+            <a:r>
+              <a:rPr lang="en-US" sz="2400" dirty="0" spc="0" kern="0">
                 <a:solidFill>
                   <a:srgbClr val="E4E1D8"/>
                 </a:solidFill>
@@ -7714,10 +7714,10 @@
                 <a:ea typeface="Be Vietnam Pro" pitchFamily="34" charset="-122"/>
                 <a:cs typeface="Be Vietnam Pro" pitchFamily="34" charset="-120"/>
               </a:rPr>
-              <a:t> bắt</a:t>
-            </a:r>
-            <a:r>
-              <a:rPr lang="en-US" sz="2400" dirty="0" spc="13" kern="0">
+              <a:t> còn</a:t>
+            </a:r>
+            <a:r>
+              <a:rPr lang="en-US" sz="2400" dirty="0" spc="-12" kern="0">
                 <a:solidFill>
                   <a:srgbClr val="E4E1D8"/>
                 </a:solidFill>
@@ -7725,10 +7725,10 @@
                 <a:ea typeface="Be Vietnam Pro" pitchFamily="34" charset="-122"/>
                 <a:cs typeface="Be Vietnam Pro" pitchFamily="34" charset="-120"/>
               </a:rPr>
-              <a:t> đầu</a:t>
-            </a:r>
-            <a:r>
-              <a:rPr lang="en-US" sz="2400" dirty="0" spc="-6" kern="0">
+              <a:t> sót</a:t>
+            </a:r>
+            <a:r>
+              <a:rPr lang="en-US" sz="2400" dirty="0" spc="0" kern="0">
                 <a:solidFill>
                   <a:srgbClr val="E4E1D8"/>
                 </a:solidFill>
@@ -7736,10 +7736,10 @@
                 <a:ea typeface="Be Vietnam Pro" pitchFamily="34" charset="-122"/>
                 <a:cs typeface="Be Vietnam Pro" pitchFamily="34" charset="-120"/>
               </a:rPr>
-              <a:t> sạch</a:t>
-            </a:r>
-            <a:r>
-              <a:rPr lang="en-US" sz="2400" dirty="0" spc="2" kern="0">
+              <a:t> có</a:t>
+            </a:r>
+            <a:r>
+              <a:rPr lang="en-US" sz="2400" dirty="0" spc="1" kern="0">
                 <a:solidFill>
                   <a:srgbClr val="E4E1D8"/>
                 </a:solidFill>
@@ -7747,10 +7747,10 @@
                 <a:ea typeface="Be Vietnam Pro" pitchFamily="34" charset="-122"/>
                 <a:cs typeface="Be Vietnam Pro" pitchFamily="34" charset="-120"/>
               </a:rPr>
-              <a:t> mỗi</a:t>
-            </a:r>
-            <a:r>
-              <a:rPr lang="en-US" sz="2400" dirty="0" spc="1" kern="0">
+              <a:t> thể</a:t>
+            </a:r>
+            <a:r>
+              <a:rPr lang="en-US" sz="2400" dirty="0" spc="-1" kern="0">
                 <a:solidFill>
                   <a:srgbClr val="E4E1D8"/>
                 </a:solidFill>
@@ -7758,10 +7758,10 @@
                 <a:ea typeface="Be Vietnam Pro" pitchFamily="34" charset="-122"/>
                 <a:cs typeface="Be Vietnam Pro" pitchFamily="34" charset="-120"/>
               </a:rPr>
-              <a:t> lần</a:t>
-            </a:r>
-            <a:r>
-              <a:rPr lang="en-US" sz="2400" dirty="0" spc="-6" kern="0">
+              <a:t> che</a:t>
+            </a:r>
+            <a:r>
+              <a:rPr lang="en-US" sz="2400" dirty="0" spc="0" kern="0">
                 <a:solidFill>
                   <a:srgbClr val="E4E1D8"/>
                 </a:solidFill>
@@ -7769,7 +7769,7 @@
                 <a:ea typeface="Be Vietnam Pro" pitchFamily="34" charset="-122"/>
                 <a:cs typeface="Be Vietnam Pro" pitchFamily="34" charset="-120"/>
               </a:rPr>
-              <a:t> chạy.</a:t>
+              <a:t> lỗi.</a:t>
             </a:r>
             <a:endParaRPr lang="en-US" sz="2400" dirty="0"/>
           </a:p>

--- a/system-design-101/vi/lessons/sd-13-014/slides/sd-13-014.pptx
+++ b/system-design-101/vi/lessons/sd-13-014/slides/sd-13-014.pptx
@@ -1790,7 +1790,7 @@
         <p:spPr>
           <a:xfrm>
             <a:off x="914400" y="1524000"/>
-            <a:ext cx="7810500" cy="3238500"/>
+            <a:ext cx="7810500" cy="4391025"/>
           </a:xfrm>
           <a:prstGeom prst="rect">
             <a:avLst/>
@@ -1799,17 +1799,17 @@
           <a:ln/>
         </p:spPr>
         <p:txBody>
-          <a:bodyPr wrap="square" lIns="0" tIns="52006" rIns="0" bIns="-52006" rtlCol="0" anchor="t"/>
+          <a:bodyPr wrap="square" lIns="0" tIns="66866" rIns="0" bIns="-66866" rtlCol="0" anchor="t"/>
           <a:lstStyle/>
           <a:p>
             <a:pPr algn="l" indent="0" marL="0">
               <a:lnSpc>
-                <a:spcPts val="6678"/>
+                <a:spcPts val="8586"/>
               </a:lnSpc>
               <a:buNone/>
             </a:pPr>
             <a:r>
-              <a:rPr lang="en-US" sz="6300" dirty="0" spc="3" kern="0">
+              <a:rPr lang="en-US" sz="8100" dirty="0" spc="2" kern="0">
                 <a:solidFill>
                   <a:srgbClr val="F3EEE3"/>
                 </a:solidFill>
@@ -1820,7 +1820,7 @@
               <a:t>CI</a:t>
             </a:r>
             <a:r>
-              <a:rPr lang="en-US" sz="6300" dirty="0" spc="18" kern="0">
+              <a:rPr lang="en-US" sz="8100" dirty="0" spc="22" kern="0">
                 <a:solidFill>
                   <a:srgbClr val="F3EEE3"/>
                 </a:solidFill>
@@ -1831,7 +1831,7 @@
               <a:t> đỏ</a:t>
             </a:r>
             <a:r>
-              <a:rPr lang="en-US" sz="6300" dirty="0" spc="4" kern="0">
+              <a:rPr lang="en-US" sz="8100" dirty="0" spc="1" kern="0">
                 <a:solidFill>
                   <a:srgbClr val="F3EEE3"/>
                 </a:solidFill>
@@ -1842,7 +1842,7 @@
               <a:t> mà</a:t>
             </a:r>
             <a:r>
-              <a:rPr lang="en-US" sz="6300" dirty="0" spc="2" kern="0">
+              <a:rPr lang="en-US" sz="8100" dirty="0" spc="2" kern="0">
                 <a:solidFill>
                   <a:srgbClr val="F3EEE3"/>
                 </a:solidFill>
@@ -1853,7 +1853,7 @@
               <a:t> máy</a:t>
             </a:r>
             <a:r>
-              <a:rPr lang="en-US" sz="6300" dirty="0" spc="-1" kern="0">
+              <a:rPr lang="en-US" sz="8100" dirty="0" spc="-4" kern="0">
                 <a:solidFill>
                   <a:srgbClr val="F3EEE3"/>
                 </a:solidFill>
@@ -1864,7 +1864,7 @@
               <a:t> bạn</a:t>
             </a:r>
             <a:r>
-              <a:rPr lang="en-US" sz="6300" dirty="0" spc="0" kern="0">
+              <a:rPr lang="en-US" sz="8100" dirty="0" spc="2" kern="0">
                 <a:solidFill>
                   <a:srgbClr val="F3EEE3"/>
                 </a:solidFill>
@@ -1875,7 +1875,7 @@
               <a:t> chạy</a:t>
             </a:r>
             <a:r>
-              <a:rPr lang="en-US" sz="6300" dirty="0" spc="-63" kern="0">
+              <a:rPr lang="en-US" sz="8100" dirty="0" spc="-85" kern="0">
                 <a:solidFill>
                   <a:srgbClr val="F3EEE3"/>
                 </a:solidFill>
@@ -1886,7 +1886,7 @@
               <a:t> được:</a:t>
             </a:r>
             <a:r>
-              <a:rPr lang="en-US" sz="6300" dirty="0" spc="4" kern="0">
+              <a:rPr lang="en-US" sz="8100" dirty="0" spc="2" kern="0">
                 <a:solidFill>
                   <a:srgbClr val="F3EEE3"/>
                 </a:solidFill>
@@ -1897,7 +1897,7 @@
               <a:t> năm</a:t>
             </a:r>
             <a:r>
-              <a:rPr lang="en-US" sz="6300" dirty="0" spc="0" kern="0">
+              <a:rPr lang="en-US" sz="8100" dirty="0" spc="0" kern="0">
                 <a:solidFill>
                   <a:srgbClr val="F3EEE3"/>
                 </a:solidFill>
@@ -1905,20 +1905,9 @@
                 <a:ea typeface="Bricolage Grotesque ExtraBold" pitchFamily="34" charset="-122"/>
                 <a:cs typeface="Bricolage Grotesque ExtraBold" pitchFamily="34" charset="-120"/>
               </a:rPr>
-              <a:t> nguồn khác</a:t>
-            </a:r>
-            <a:r>
-              <a:rPr lang="en-US" sz="6300" dirty="0" spc="2" kern="0">
-                <a:solidFill>
-                  <a:srgbClr val="F3EEE3"/>
-                </a:solidFill>
-                <a:latin typeface="Bricolage Grotesque ExtraBold" pitchFamily="34" charset="0"/>
-                <a:ea typeface="Bricolage Grotesque ExtraBold" pitchFamily="34" charset="-122"/>
-                <a:cs typeface="Bricolage Grotesque ExtraBold" pitchFamily="34" charset="-120"/>
-              </a:rPr>
-              <a:t> biệt</a:t>
-            </a:r>
-            <a:endParaRPr lang="en-US" sz="6300" dirty="0"/>
+              <a:t> nguồn khác biệt</a:t>
+            </a:r>
+            <a:endParaRPr lang="en-US" sz="8100" dirty="0"/>
           </a:p>
         </p:txBody>
       </p:sp>
@@ -1930,7 +1919,7 @@
         </p:nvSpPr>
         <p:spPr>
           <a:xfrm>
-            <a:off x="914400" y="5334000"/>
+            <a:off x="914400" y="6296025"/>
             <a:ext cx="7810500" cy="1047750"/>
           </a:xfrm>
           <a:prstGeom prst="rect">
@@ -2099,7 +2088,7 @@
               <a:t> nhóm</a:t>
             </a:r>
             <a:r>
-              <a:rPr lang="en-US" sz="1650" dirty="0" spc="-3" kern="0">
+              <a:rPr lang="en-US" sz="1650" dirty="0" spc="-4" kern="0">
                 <a:solidFill>
                   <a:srgbClr val="9AA0B5"/>
                 </a:solidFill>
@@ -2107,10 +2096,10 @@
                 <a:ea typeface="Be Vietnam Pro" pitchFamily="34" charset="-122"/>
                 <a:cs typeface="Be Vietnam Pro" pitchFamily="34" charset="-120"/>
               </a:rPr>
-              <a:t> Quan</a:t>
-            </a:r>
-            <a:r>
-              <a:rPr lang="en-US" sz="1650" dirty="0" spc="-9" kern="0">
+              <a:t> DevOps</a:t>
+            </a:r>
+            <a:r>
+              <a:rPr lang="en-US" sz="1650" dirty="0" spc="-7" kern="0">
                 <a:solidFill>
                   <a:srgbClr val="9AA0B5"/>
                 </a:solidFill>
@@ -2118,7 +2107,7 @@
                 <a:ea typeface="Be Vietnam Pro" pitchFamily="34" charset="-122"/>
                 <a:cs typeface="Be Vietnam Pro" pitchFamily="34" charset="-120"/>
               </a:rPr>
-              <a:t> sát</a:t>
+              <a:t> và</a:t>
             </a:r>
             <a:r>
               <a:rPr lang="en-US" sz="1650" dirty="0" spc="3" kern="0">
@@ -2129,18 +2118,7 @@
                 <a:ea typeface="Be Vietnam Pro" pitchFamily="34" charset="-122"/>
                 <a:cs typeface="Be Vietnam Pro" pitchFamily="34" charset="-120"/>
               </a:rPr>
-              <a:t> hệ</a:t>
-            </a:r>
-            <a:r>
-              <a:rPr lang="en-US" sz="1650" dirty="0" spc="1" kern="0">
-                <a:solidFill>
-                  <a:srgbClr val="9AA0B5"/>
-                </a:solidFill>
-                <a:latin typeface="Be Vietnam Pro" pitchFamily="34" charset="0"/>
-                <a:ea typeface="Be Vietnam Pro" pitchFamily="34" charset="-122"/>
-                <a:cs typeface="Be Vietnam Pro" pitchFamily="34" charset="-120"/>
-              </a:rPr>
-              <a:t> thống</a:t>
+              <a:t> CI/CD</a:t>
             </a:r>
             <a:endParaRPr lang="en-US" sz="1650" dirty="0"/>
           </a:p>
@@ -3066,7 +3044,7 @@
         <p:spPr>
           <a:xfrm>
             <a:off x="914400" y="1295400"/>
-            <a:ext cx="16192500" cy="914400"/>
+            <a:ext cx="16192500" cy="1085850"/>
           </a:xfrm>
           <a:prstGeom prst="rect">
             <a:avLst/>
@@ -3082,7 +3060,7 @@
               <a:buNone/>
             </a:pPr>
             <a:r>
-              <a:rPr lang="en-US" sz="5400" dirty="0" spc="-66" kern="0">
+              <a:rPr lang="en-US" sz="6900" dirty="0" spc="-83" kern="0">
                 <a:solidFill>
                   <a:srgbClr val="F3EEE3"/>
                 </a:solidFill>
@@ -3093,7 +3071,7 @@
               <a:t>Tra</a:t>
             </a:r>
             <a:r>
-              <a:rPr lang="en-US" sz="5400" dirty="0" spc="-2" kern="0">
+              <a:rPr lang="en-US" sz="6900" dirty="0" spc="0" kern="0">
                 <a:solidFill>
                   <a:srgbClr val="F3EEE3"/>
                 </a:solidFill>
@@ -3101,10 +3079,10 @@
                 <a:ea typeface="Bricolage Grotesque ExtraBold" pitchFamily="34" charset="-122"/>
                 <a:cs typeface="Bricolage Grotesque ExtraBold" pitchFamily="34" charset="-120"/>
               </a:rPr>
-              <a:t> lại khi</a:t>
-            </a:r>
-            <a:r>
-              <a:rPr lang="en-US" sz="5400" dirty="0" spc="-3" kern="0">
+              <a:t> lại</a:t>
+            </a:r>
+            <a:r>
+              <a:rPr lang="en-US" sz="6900" dirty="0" spc="1" kern="0">
                 <a:solidFill>
                   <a:srgbClr val="F3EEE3"/>
                 </a:solidFill>
@@ -3112,9 +3090,20 @@
                 <a:ea typeface="Bricolage Grotesque ExtraBold" pitchFamily="34" charset="-122"/>
                 <a:cs typeface="Bricolage Grotesque ExtraBold" pitchFamily="34" charset="-120"/>
               </a:rPr>
+              <a:t> khi</a:t>
+            </a:r>
+            <a:r>
+              <a:rPr lang="en-US" sz="6900" dirty="0" spc="-2" kern="0">
+                <a:solidFill>
+                  <a:srgbClr val="F3EEE3"/>
+                </a:solidFill>
+                <a:latin typeface="Bricolage Grotesque ExtraBold" pitchFamily="34" charset="0"/>
+                <a:ea typeface="Bricolage Grotesque ExtraBold" pitchFamily="34" charset="-122"/>
+                <a:cs typeface="Bricolage Grotesque ExtraBold" pitchFamily="34" charset="-120"/>
+              </a:rPr>
               <a:t> cần</a:t>
             </a:r>
-            <a:endParaRPr lang="en-US" sz="5400" dirty="0"/>
+            <a:endParaRPr lang="en-US" sz="6900" dirty="0"/>
           </a:p>
         </p:txBody>
       </p:sp>
@@ -4553,17 +4542,17 @@
           <a:ln/>
         </p:spPr>
         <p:txBody>
-          <a:bodyPr wrap="square" lIns="0" tIns="32004" rIns="0" bIns="-32004" rtlCol="0" anchor="t"/>
+          <a:bodyPr wrap="square" lIns="0" tIns="35052" rIns="0" bIns="-35052" rtlCol="0" anchor="t"/>
           <a:lstStyle/>
           <a:p>
             <a:pPr algn="l" indent="0" marL="0">
               <a:lnSpc>
-                <a:spcPts val="7056"/>
+                <a:spcPts val="7728"/>
               </a:lnSpc>
               <a:buNone/>
             </a:pPr>
             <a:r>
-              <a:rPr lang="en-US" sz="6300" dirty="0" spc="2" kern="0">
+              <a:rPr lang="en-US" sz="6900" dirty="0" spc="5" kern="0">
                 <a:solidFill>
                   <a:srgbClr val="14161C"/>
                 </a:solidFill>
@@ -4574,7 +4563,7 @@
               <a:t>Pipeline</a:t>
             </a:r>
             <a:r>
-              <a:rPr lang="en-US" sz="6300" dirty="0" spc="-54" kern="0">
+              <a:rPr lang="en-US" sz="6900" dirty="0" spc="-62" kern="0">
                 <a:solidFill>
                   <a:srgbClr val="14161C"/>
                 </a:solidFill>
@@ -4585,7 +4574,7 @@
               <a:t> thường</a:t>
             </a:r>
             <a:r>
-              <a:rPr lang="en-US" sz="6300" dirty="0" spc="0" kern="0">
+              <a:rPr lang="en-US" sz="6900" dirty="0" spc="0" kern="0">
                 <a:solidFill>
                   <a:srgbClr val="14161C"/>
                 </a:solidFill>
@@ -4596,7 +4585,7 @@
               <a:t> không</a:t>
             </a:r>
             <a:r>
-              <a:rPr lang="en-US" sz="6300" dirty="0" spc="11" kern="0">
+              <a:rPr lang="en-US" sz="6900" dirty="0" spc="13" kern="0">
                 <a:solidFill>
                   <a:srgbClr val="14161C"/>
                 </a:solidFill>
@@ -4607,7 +4596,7 @@
               <a:t> sai;</a:t>
             </a:r>
             <a:r>
-              <a:rPr lang="en-US" sz="6300" dirty="0" spc="2" kern="0">
+              <a:rPr lang="en-US" sz="6900" dirty="0" spc="2" kern="0">
                 <a:solidFill>
                   <a:srgbClr val="14161C"/>
                 </a:solidFill>
@@ -4615,10 +4604,10 @@
                 <a:ea typeface="Bricolage Grotesque ExtraBold" pitchFamily="34" charset="-122"/>
                 <a:cs typeface="Bricolage Grotesque ExtraBold" pitchFamily="34" charset="-120"/>
               </a:rPr>
-              <a:t> hai môi</a:t>
-            </a:r>
-            <a:r>
-              <a:rPr lang="en-US" sz="6300" dirty="0" spc="-50" kern="0">
+              <a:t> hai</a:t>
+            </a:r>
+            <a:r>
+              <a:rPr lang="en-US" sz="6900" dirty="0" spc="0" kern="0">
                 <a:solidFill>
                   <a:srgbClr val="14161C"/>
                 </a:solidFill>
@@ -4626,10 +4615,10 @@
                 <a:ea typeface="Bricolage Grotesque ExtraBold" pitchFamily="34" charset="-122"/>
                 <a:cs typeface="Bricolage Grotesque ExtraBold" pitchFamily="34" charset="-120"/>
               </a:rPr>
-              <a:t> trường</a:t>
-            </a:r>
-            <a:r>
-              <a:rPr lang="en-US" sz="6300" dirty="0" spc="0" kern="0">
+              <a:t> môi</a:t>
+            </a:r>
+            <a:r>
+              <a:rPr lang="en-US" sz="6900" dirty="0" spc="-58" kern="0">
                 <a:solidFill>
                   <a:srgbClr val="14161C"/>
                 </a:solidFill>
@@ -4637,10 +4626,10 @@
                 <a:ea typeface="Bricolage Grotesque ExtraBold" pitchFamily="34" charset="-122"/>
                 <a:cs typeface="Bricolage Grotesque ExtraBold" pitchFamily="34" charset="-120"/>
               </a:rPr>
-              <a:t> khác</a:t>
-            </a:r>
-            <a:r>
-              <a:rPr lang="en-US" sz="6300" dirty="0" spc="2" kern="0">
+              <a:t> trường</a:t>
+            </a:r>
+            <a:r>
+              <a:rPr lang="en-US" sz="6900" dirty="0" spc="0" kern="0">
                 <a:solidFill>
                   <a:srgbClr val="14161C"/>
                 </a:solidFill>
@@ -4648,10 +4637,10 @@
                 <a:ea typeface="Bricolage Grotesque ExtraBold" pitchFamily="34" charset="-122"/>
                 <a:cs typeface="Bricolage Grotesque ExtraBold" pitchFamily="34" charset="-120"/>
               </a:rPr>
-              <a:t> nhau</a:t>
-            </a:r>
-            <a:r>
-              <a:rPr lang="en-US" sz="6300" dirty="0" spc="-7" kern="0">
+              <a:t> khác</a:t>
+            </a:r>
+            <a:r>
+              <a:rPr lang="en-US" sz="6900" dirty="0" spc="3" kern="0">
                 <a:solidFill>
                   <a:srgbClr val="14161C"/>
                 </a:solidFill>
@@ -4659,10 +4648,10 @@
                 <a:ea typeface="Bricolage Grotesque ExtraBold" pitchFamily="34" charset="-122"/>
                 <a:cs typeface="Bricolage Grotesque ExtraBold" pitchFamily="34" charset="-120"/>
               </a:rPr>
-              <a:t> một</a:t>
-            </a:r>
-            <a:r>
-              <a:rPr lang="en-US" sz="6300" dirty="0" spc="-14" kern="0">
+              <a:t> nhau</a:t>
+            </a:r>
+            <a:r>
+              <a:rPr lang="en-US" sz="6900" dirty="0" spc="-10" kern="0">
                 <a:solidFill>
                   <a:srgbClr val="14161C"/>
                 </a:solidFill>
@@ -4670,9 +4659,20 @@
                 <a:ea typeface="Bricolage Grotesque ExtraBold" pitchFamily="34" charset="-122"/>
                 <a:cs typeface="Bricolage Grotesque ExtraBold" pitchFamily="34" charset="-120"/>
               </a:rPr>
+              <a:t> một</a:t>
+            </a:r>
+            <a:r>
+              <a:rPr lang="en-US" sz="6900" dirty="0" spc="-17" kern="0">
+                <a:solidFill>
+                  <a:srgbClr val="14161C"/>
+                </a:solidFill>
+                <a:latin typeface="Bricolage Grotesque ExtraBold" pitchFamily="34" charset="0"/>
+                <a:ea typeface="Bricolage Grotesque ExtraBold" pitchFamily="34" charset="-122"/>
+                <a:cs typeface="Bricolage Grotesque ExtraBold" pitchFamily="34" charset="-120"/>
+              </a:rPr>
               <a:t> chỗ.</a:t>
             </a:r>
-            <a:endParaRPr lang="en-US" sz="6300" dirty="0"/>
+            <a:endParaRPr lang="en-US" sz="6900" dirty="0"/>
           </a:p>
         </p:txBody>
       </p:sp>
@@ -5529,7 +5529,7 @@
         <p:spPr>
           <a:xfrm>
             <a:off x="914400" y="1333500"/>
-            <a:ext cx="16459200" cy="952500"/>
+            <a:ext cx="16459200" cy="1085850"/>
           </a:xfrm>
           <a:prstGeom prst="rect">
             <a:avLst/>
@@ -5545,7 +5545,7 @@
               <a:buNone/>
             </a:pPr>
             <a:r>
-              <a:rPr lang="en-US" sz="5100" dirty="0" spc="1" kern="0">
+              <a:rPr lang="en-US" sz="6900" dirty="0" spc="0" kern="0">
                 <a:solidFill>
                   <a:srgbClr val="14161C"/>
                 </a:solidFill>
@@ -5556,7 +5556,7 @@
               <a:t>Khác</a:t>
             </a:r>
             <a:r>
-              <a:rPr lang="en-US" sz="5100" dirty="0" spc="6" kern="0">
+              <a:rPr lang="en-US" sz="6900" dirty="0" spc="6" kern="0">
                 <a:solidFill>
                   <a:srgbClr val="14161C"/>
                 </a:solidFill>
@@ -5567,7 +5567,7 @@
               <a:t> phiên</a:t>
             </a:r>
             <a:r>
-              <a:rPr lang="en-US" sz="5100" dirty="0" spc="-4" kern="0">
+              <a:rPr lang="en-US" sz="6900" dirty="0" spc="-3" kern="0">
                 <a:solidFill>
                   <a:srgbClr val="14161C"/>
                 </a:solidFill>
@@ -5578,7 +5578,7 @@
               <a:t> bản,</a:t>
             </a:r>
             <a:r>
-              <a:rPr lang="en-US" sz="5100" dirty="0" spc="0" kern="0">
+              <a:rPr lang="en-US" sz="6900" dirty="0" spc="-1" kern="0">
                 <a:solidFill>
                   <a:srgbClr val="14161C"/>
                 </a:solidFill>
@@ -5589,7 +5589,7 @@
               <a:t> khác</a:t>
             </a:r>
             <a:r>
-              <a:rPr lang="en-US" sz="5100" dirty="0" spc="1" kern="0">
+              <a:rPr lang="en-US" sz="6900" dirty="0" spc="0" kern="0">
                 <a:solidFill>
                   <a:srgbClr val="14161C"/>
                 </a:solidFill>
@@ -5600,7 +5600,7 @@
               <a:t> môi</a:t>
             </a:r>
             <a:r>
-              <a:rPr lang="en-US" sz="5100" dirty="0" spc="-42" kern="0">
+              <a:rPr lang="en-US" sz="6900" dirty="0" spc="-58" kern="0">
                 <a:solidFill>
                   <a:srgbClr val="14161C"/>
                 </a:solidFill>
@@ -5610,7 +5610,7 @@
               </a:rPr>
               <a:t> trường</a:t>
             </a:r>
-            <a:endParaRPr lang="en-US" sz="5100" dirty="0"/>
+            <a:endParaRPr lang="en-US" sz="6900" dirty="0"/>
           </a:p>
         </p:txBody>
       </p:sp>
@@ -7322,7 +7322,7 @@
         <p:spPr>
           <a:xfrm>
             <a:off x="914400" y="1333500"/>
-            <a:ext cx="16459200" cy="952500"/>
+            <a:ext cx="16459200" cy="1085850"/>
           </a:xfrm>
           <a:prstGeom prst="rect">
             <a:avLst/>
@@ -7338,7 +7338,7 @@
               <a:buNone/>
             </a:pPr>
             <a:r>
-              <a:rPr lang="en-US" sz="5100" dirty="0" spc="-1" kern="0">
+              <a:rPr lang="en-US" sz="6900" dirty="0" spc="-4" kern="0">
                 <a:solidFill>
                   <a:srgbClr val="F3EEE3"/>
                 </a:solidFill>
@@ -7346,10 +7346,10 @@
                 <a:ea typeface="Bricolage Grotesque ExtraBold" pitchFamily="34" charset="-122"/>
                 <a:cs typeface="Bricolage Grotesque ExtraBold" pitchFamily="34" charset="-120"/>
               </a:rPr>
-              <a:t>Máy</a:t>
-            </a:r>
-            <a:r>
-              <a:rPr lang="en-US" sz="5100" dirty="0" spc="-3" kern="0">
+              <a:t>Máy bạn</a:t>
+            </a:r>
+            <a:r>
+              <a:rPr lang="en-US" sz="6900" dirty="0" spc="0" kern="0">
                 <a:solidFill>
                   <a:srgbClr val="F3EEE3"/>
                 </a:solidFill>
@@ -7357,10 +7357,10 @@
                 <a:ea typeface="Bricolage Grotesque ExtraBold" pitchFamily="34" charset="-122"/>
                 <a:cs typeface="Bricolage Grotesque ExtraBold" pitchFamily="34" charset="-120"/>
               </a:rPr>
-              <a:t> bạn</a:t>
-            </a:r>
-            <a:r>
-              <a:rPr lang="en-US" sz="5100" dirty="0" spc="1" kern="0">
+              <a:t> giữ thứ mà</a:t>
+            </a:r>
+            <a:r>
+              <a:rPr lang="en-US" sz="6900" dirty="0" spc="9" kern="0">
                 <a:solidFill>
                   <a:srgbClr val="F3EEE3"/>
                 </a:solidFill>
@@ -7368,10 +7368,10 @@
                 <a:ea typeface="Bricolage Grotesque ExtraBold" pitchFamily="34" charset="-122"/>
                 <a:cs typeface="Bricolage Grotesque ExtraBold" pitchFamily="34" charset="-120"/>
               </a:rPr>
-              <a:t> giữ thứ</a:t>
-            </a:r>
-            <a:r>
-              <a:rPr lang="en-US" sz="5100" dirty="0" spc="-2" kern="0">
+              <a:t> runner</a:t>
+            </a:r>
+            <a:r>
+              <a:rPr lang="en-US" sz="6900" dirty="0" spc="0" kern="0">
                 <a:solidFill>
                   <a:srgbClr val="F3EEE3"/>
                 </a:solidFill>
@@ -7379,10 +7379,10 @@
                 <a:ea typeface="Bricolage Grotesque ExtraBold" pitchFamily="34" charset="-122"/>
                 <a:cs typeface="Bricolage Grotesque ExtraBold" pitchFamily="34" charset="-120"/>
               </a:rPr>
-              <a:t> mà</a:t>
-            </a:r>
-            <a:r>
-              <a:rPr lang="en-US" sz="5100" dirty="0" spc="7" kern="0">
+              <a:t> không</a:t>
+            </a:r>
+            <a:r>
+              <a:rPr lang="en-US" sz="6900" dirty="0" spc="-1" kern="0">
                 <a:solidFill>
                   <a:srgbClr val="F3EEE3"/>
                 </a:solidFill>
@@ -7390,20 +7390,9 @@
                 <a:ea typeface="Bricolage Grotesque ExtraBold" pitchFamily="34" charset="-122"/>
                 <a:cs typeface="Bricolage Grotesque ExtraBold" pitchFamily="34" charset="-120"/>
               </a:rPr>
-              <a:t> runner</a:t>
-            </a:r>
-            <a:r>
-              <a:rPr lang="en-US" sz="5100" dirty="0" spc="1" kern="0">
-                <a:solidFill>
-                  <a:srgbClr val="F3EEE3"/>
-                </a:solidFill>
-                <a:latin typeface="Bricolage Grotesque ExtraBold" pitchFamily="34" charset="0"/>
-                <a:ea typeface="Bricolage Grotesque ExtraBold" pitchFamily="34" charset="-122"/>
-                <a:cs typeface="Bricolage Grotesque ExtraBold" pitchFamily="34" charset="-120"/>
-              </a:rPr>
-              <a:t> không có</a:t>
-            </a:r>
-            <a:endParaRPr lang="en-US" sz="5100" dirty="0"/>
+              <a:t> có</a:t>
+            </a:r>
+            <a:endParaRPr lang="en-US" sz="6900" dirty="0"/>
           </a:p>
         </p:txBody>
       </p:sp>
@@ -8899,7 +8888,7 @@
         <p:spPr>
           <a:xfrm>
             <a:off x="914400" y="1333500"/>
-            <a:ext cx="16459200" cy="952500"/>
+            <a:ext cx="16459200" cy="1085850"/>
           </a:xfrm>
           <a:prstGeom prst="rect">
             <a:avLst/>
@@ -8915,7 +8904,7 @@
               <a:buNone/>
             </a:pPr>
             <a:r>
-              <a:rPr lang="en-US" sz="5100" dirty="0" spc="3" kern="0">
+              <a:rPr lang="en-US" sz="6900" dirty="0" spc="2" kern="0">
                 <a:solidFill>
                   <a:srgbClr val="14161C"/>
                 </a:solidFill>
@@ -8926,7 +8915,7 @@
               <a:t>Khai</a:t>
             </a:r>
             <a:r>
-              <a:rPr lang="en-US" sz="5100" dirty="0" spc="-4" kern="0">
+              <a:rPr lang="en-US" sz="6900" dirty="0" spc="0" kern="0">
                 <a:solidFill>
                   <a:srgbClr val="14161C"/>
                 </a:solidFill>
@@ -8934,10 +8923,10 @@
                 <a:ea typeface="Bricolage Grotesque ExtraBold" pitchFamily="34" charset="-122"/>
                 <a:cs typeface="Bricolage Grotesque ExtraBold" pitchFamily="34" charset="-120"/>
               </a:rPr>
-              <a:t> báo</a:t>
-            </a:r>
-            <a:r>
-              <a:rPr lang="en-US" sz="5100" dirty="0" spc="2" kern="0">
+              <a:t> mọi</a:t>
+            </a:r>
+            <a:r>
+              <a:rPr lang="en-US" sz="6900" dirty="0" spc="9" kern="0">
                 <a:solidFill>
                   <a:srgbClr val="14161C"/>
                 </a:solidFill>
@@ -8945,10 +8934,10 @@
                 <a:ea typeface="Bricolage Grotesque ExtraBold" pitchFamily="34" charset="-122"/>
                 <a:cs typeface="Bricolage Grotesque ExtraBold" pitchFamily="34" charset="-120"/>
               </a:rPr>
-              <a:t> mọi</a:t>
-            </a:r>
-            <a:r>
-              <a:rPr lang="en-US" sz="5100" dirty="0" spc="6" kern="0">
+              <a:t> đầu</a:t>
+            </a:r>
+            <a:r>
+              <a:rPr lang="en-US" sz="6900" dirty="0" spc="-57" kern="0">
                 <a:solidFill>
                   <a:srgbClr val="14161C"/>
                 </a:solidFill>
@@ -8956,10 +8945,10 @@
                 <a:ea typeface="Bricolage Grotesque ExtraBold" pitchFamily="34" charset="-122"/>
                 <a:cs typeface="Bricolage Grotesque ExtraBold" pitchFamily="34" charset="-120"/>
               </a:rPr>
-              <a:t> đầu</a:t>
-            </a:r>
-            <a:r>
-              <a:rPr lang="en-US" sz="5100" dirty="0" spc="-41" kern="0">
+              <a:t> vào</a:t>
+            </a:r>
+            <a:r>
+              <a:rPr lang="en-US" sz="6900" dirty="0" spc="-13" kern="0">
                 <a:solidFill>
                   <a:srgbClr val="14161C"/>
                 </a:solidFill>
@@ -8967,10 +8956,10 @@
                 <a:ea typeface="Bricolage Grotesque ExtraBold" pitchFamily="34" charset="-122"/>
                 <a:cs typeface="Bricolage Grotesque ExtraBold" pitchFamily="34" charset="-120"/>
               </a:rPr>
-              <a:t> vào</a:t>
-            </a:r>
-            <a:r>
-              <a:rPr lang="en-US" sz="5100" dirty="0" spc="-9" kern="0">
+              <a:t> trong</a:t>
+            </a:r>
+            <a:r>
+              <a:rPr lang="en-US" sz="6900" dirty="0" spc="-37" kern="0">
                 <a:solidFill>
                   <a:srgbClr val="14161C"/>
                 </a:solidFill>
@@ -8978,31 +8967,9 @@
                 <a:ea typeface="Bricolage Grotesque ExtraBold" pitchFamily="34" charset="-122"/>
                 <a:cs typeface="Bricolage Grotesque ExtraBold" pitchFamily="34" charset="-120"/>
               </a:rPr>
-              <a:t> trong</a:t>
-            </a:r>
-            <a:r>
-              <a:rPr lang="en-US" sz="5100" dirty="0" spc="-14" kern="0">
-                <a:solidFill>
-                  <a:srgbClr val="14161C"/>
-                </a:solidFill>
-                <a:latin typeface="Bricolage Grotesque ExtraBold" pitchFamily="34" charset="0"/>
-                <a:ea typeface="Bricolage Grotesque ExtraBold" pitchFamily="34" charset="-122"/>
-                <a:cs typeface="Bricolage Grotesque ExtraBold" pitchFamily="34" charset="-120"/>
-              </a:rPr>
-              <a:t> tệp</a:t>
-            </a:r>
-            <a:r>
-              <a:rPr lang="en-US" sz="5100" dirty="0" spc="-25" kern="0">
-                <a:solidFill>
-                  <a:srgbClr val="14161C"/>
-                </a:solidFill>
-                <a:latin typeface="Bricolage Grotesque ExtraBold" pitchFamily="34" charset="0"/>
-                <a:ea typeface="Bricolage Grotesque ExtraBold" pitchFamily="34" charset="-122"/>
-                <a:cs typeface="Bricolage Grotesque ExtraBold" pitchFamily="34" charset="-120"/>
-              </a:rPr>
               <a:t> workflow</a:t>
             </a:r>
-            <a:endParaRPr lang="en-US" sz="5100" dirty="0"/>
+            <a:endParaRPr lang="en-US" sz="6900" dirty="0"/>
           </a:p>
         </p:txBody>
       </p:sp>
@@ -10530,7 +10497,7 @@
         <p:spPr>
           <a:xfrm>
             <a:off x="914400" y="1333500"/>
-            <a:ext cx="16459200" cy="952500"/>
+            <a:ext cx="16459200" cy="1085850"/>
           </a:xfrm>
           <a:prstGeom prst="rect">
             <a:avLst/>
@@ -10546,7 +10513,7 @@
               <a:buNone/>
             </a:pPr>
             <a:r>
-              <a:rPr lang="en-US" sz="5100" dirty="0" spc="-98" kern="0">
+              <a:rPr lang="en-US" sz="6900" dirty="0" spc="-129" kern="0">
                 <a:solidFill>
                   <a:srgbClr val="14161C"/>
                 </a:solidFill>
@@ -10557,7 +10524,7 @@
               <a:t>Test</a:t>
             </a:r>
             <a:r>
-              <a:rPr lang="en-US" sz="5100" dirty="0" spc="-44" kern="0">
+              <a:rPr lang="en-US" sz="6900" dirty="0" spc="-59" kern="0">
                 <a:solidFill>
                   <a:srgbClr val="14161C"/>
                 </a:solidFill>
@@ -10568,7 +10535,7 @@
               <a:t> dựa</a:t>
             </a:r>
             <a:r>
-              <a:rPr lang="en-US" sz="5100" dirty="0" spc="-41" kern="0">
+              <a:rPr lang="en-US" sz="6900" dirty="0" spc="-57" kern="0">
                 <a:solidFill>
                   <a:srgbClr val="14161C"/>
                 </a:solidFill>
@@ -10579,7 +10546,7 @@
               <a:t> vào</a:t>
             </a:r>
             <a:r>
-              <a:rPr lang="en-US" sz="5100" dirty="0" spc="1" kern="0">
+              <a:rPr lang="en-US" sz="6900" dirty="0" spc="0" kern="0">
                 <a:solidFill>
                   <a:srgbClr val="14161C"/>
                 </a:solidFill>
@@ -10587,9 +10554,31 @@
                 <a:ea typeface="Bricolage Grotesque ExtraBold" pitchFamily="34" charset="-122"/>
                 <a:cs typeface="Bricolage Grotesque ExtraBold" pitchFamily="34" charset="-120"/>
               </a:rPr>
-              <a:t> thứ dùng chung</a:t>
-            </a:r>
-            <a:endParaRPr lang="en-US" sz="5100" dirty="0"/>
+              <a:t> thứ</a:t>
+            </a:r>
+            <a:r>
+              <a:rPr lang="en-US" sz="6900" dirty="0" spc="2" kern="0">
+                <a:solidFill>
+                  <a:srgbClr val="14161C"/>
+                </a:solidFill>
+                <a:latin typeface="Bricolage Grotesque ExtraBold" pitchFamily="34" charset="0"/>
+                <a:ea typeface="Bricolage Grotesque ExtraBold" pitchFamily="34" charset="-122"/>
+                <a:cs typeface="Bricolage Grotesque ExtraBold" pitchFamily="34" charset="-120"/>
+              </a:rPr>
+              <a:t> dùng</a:t>
+            </a:r>
+            <a:r>
+              <a:rPr lang="en-US" sz="6900" dirty="0" spc="1" kern="0">
+                <a:solidFill>
+                  <a:srgbClr val="14161C"/>
+                </a:solidFill>
+                <a:latin typeface="Bricolage Grotesque ExtraBold" pitchFamily="34" charset="0"/>
+                <a:ea typeface="Bricolage Grotesque ExtraBold" pitchFamily="34" charset="-122"/>
+                <a:cs typeface="Bricolage Grotesque ExtraBold" pitchFamily="34" charset="-120"/>
+              </a:rPr>
+              <a:t> chung</a:t>
+            </a:r>
+            <a:endParaRPr lang="en-US" sz="6900" dirty="0"/>
           </a:p>
         </p:txBody>
       </p:sp>
@@ -12155,7 +12144,7 @@
         <p:spPr>
           <a:xfrm>
             <a:off x="914400" y="1333500"/>
-            <a:ext cx="16459200" cy="952500"/>
+            <a:ext cx="16459200" cy="1085850"/>
           </a:xfrm>
           <a:prstGeom prst="rect">
             <a:avLst/>
@@ -12171,7 +12160,7 @@
               <a:buNone/>
             </a:pPr>
             <a:r>
-              <a:rPr lang="en-US" sz="5100" dirty="0" spc="-2" kern="0">
+              <a:rPr lang="en-US" sz="6900" dirty="0" spc="-2" kern="0">
                 <a:solidFill>
                   <a:srgbClr val="F3EEE3"/>
                 </a:solidFill>
@@ -12182,7 +12171,7 @@
               <a:t>Năm</a:t>
             </a:r>
             <a:r>
-              <a:rPr lang="en-US" sz="5100" dirty="0" spc="2" kern="0">
+              <a:rPr lang="en-US" sz="6900" dirty="0" spc="2" kern="0">
                 <a:solidFill>
                   <a:srgbClr val="F3EEE3"/>
                 </a:solidFill>
@@ -12193,7 +12182,7 @@
               <a:t> nguồn</a:t>
             </a:r>
             <a:r>
-              <a:rPr lang="en-US" sz="5100" dirty="0" spc="1" kern="0">
+              <a:rPr lang="en-US" sz="6900" dirty="0" spc="-47" kern="0">
                 <a:solidFill>
                   <a:srgbClr val="F3EEE3"/>
                 </a:solidFill>
@@ -12201,10 +12190,10 @@
                 <a:ea typeface="Bricolage Grotesque ExtraBold" pitchFamily="34" charset="-122"/>
                 <a:cs typeface="Bricolage Grotesque ExtraBold" pitchFamily="34" charset="-120"/>
               </a:rPr>
-              <a:t> không</a:t>
-            </a:r>
-            <a:r>
-              <a:rPr lang="en-US" sz="5100" dirty="0" spc="4" kern="0">
+              <a:t> chưa</a:t>
+            </a:r>
+            <a:r>
+              <a:rPr lang="en-US" sz="6900" dirty="0" spc="4" kern="0">
                 <a:solidFill>
                   <a:srgbClr val="F3EEE3"/>
                 </a:solidFill>
@@ -12215,7 +12204,7 @@
               <a:t> phải</a:t>
             </a:r>
             <a:r>
-              <a:rPr lang="en-US" sz="5100" dirty="0" spc="2" kern="0">
+              <a:rPr lang="en-US" sz="6900" dirty="0" spc="-5" kern="0">
                 <a:solidFill>
                   <a:srgbClr val="F3EEE3"/>
                 </a:solidFill>
@@ -12223,10 +12212,10 @@
                 <a:ea typeface="Bricolage Grotesque ExtraBold" pitchFamily="34" charset="-122"/>
                 <a:cs typeface="Bricolage Grotesque ExtraBold" pitchFamily="34" charset="-120"/>
               </a:rPr>
-              <a:t> mọi nguyên</a:t>
-            </a:r>
-            <a:r>
-              <a:rPr lang="en-US" sz="5100" dirty="0" spc="1" kern="0">
+              <a:t> tất</a:t>
+            </a:r>
+            <a:r>
+              <a:rPr lang="en-US" sz="6900" dirty="0" spc="-1" kern="0">
                 <a:solidFill>
                   <a:srgbClr val="F3EEE3"/>
                 </a:solidFill>
@@ -12234,9 +12223,9 @@
                 <a:ea typeface="Bricolage Grotesque ExtraBold" pitchFamily="34" charset="-122"/>
                 <a:cs typeface="Bricolage Grotesque ExtraBold" pitchFamily="34" charset="-120"/>
               </a:rPr>
-              <a:t> nhân</a:t>
-            </a:r>
-            <a:endParaRPr lang="en-US" sz="5100" dirty="0"/>
+              <a:t> cả</a:t>
+            </a:r>
+            <a:endParaRPr lang="en-US" sz="6900" dirty="0"/>
           </a:p>
         </p:txBody>
       </p:sp>
@@ -13466,7 +13455,7 @@
         <p:spPr>
           <a:xfrm>
             <a:off x="914400" y="1333500"/>
-            <a:ext cx="16459200" cy="952500"/>
+            <a:ext cx="16459200" cy="1085850"/>
           </a:xfrm>
           <a:prstGeom prst="rect">
             <a:avLst/>
@@ -13482,7 +13471,7 @@
               <a:buNone/>
             </a:pPr>
             <a:r>
-              <a:rPr lang="en-US" sz="4500" dirty="0" spc="2" kern="0">
+              <a:rPr lang="en-US" sz="6900" dirty="0" spc="0" kern="0">
                 <a:solidFill>
                   <a:srgbClr val="14161C"/>
                 </a:solidFill>
@@ -13490,10 +13479,10 @@
                 <a:ea typeface="Bricolage Grotesque ExtraBold" pitchFamily="34" charset="-122"/>
                 <a:cs typeface="Bricolage Grotesque ExtraBold" pitchFamily="34" charset="-120"/>
               </a:rPr>
-              <a:t>Mã</a:t>
-            </a:r>
-            <a:r>
-              <a:rPr lang="en-US" sz="4500" dirty="0" spc="-27" kern="0">
+              <a:t>Config.json khác</a:t>
+            </a:r>
+            <a:r>
+              <a:rPr lang="en-US" sz="6900" dirty="0" spc="-9" kern="0">
                 <a:solidFill>
                   <a:srgbClr val="14161C"/>
                 </a:solidFill>
@@ -13501,64 +13490,9 @@
                 <a:ea typeface="Bricolage Grotesque ExtraBold" pitchFamily="34" charset="-122"/>
                 <a:cs typeface="Bricolage Grotesque ExtraBold" pitchFamily="34" charset="-120"/>
               </a:rPr>
-              <a:t> gọi</a:t>
-            </a:r>
-            <a:r>
-              <a:rPr lang="en-US" sz="4500" dirty="0" spc="1" kern="0">
-                <a:solidFill>
-                  <a:srgbClr val="14161C"/>
-                </a:solidFill>
-                <a:latin typeface="Bricolage Grotesque ExtraBold" pitchFamily="34" charset="0"/>
-                <a:ea typeface="Bricolage Grotesque ExtraBold" pitchFamily="34" charset="-122"/>
-                <a:cs typeface="Bricolage Grotesque ExtraBold" pitchFamily="34" charset="-120"/>
-              </a:rPr>
-              <a:t> Config.json,</a:t>
-            </a:r>
-            <a:r>
-              <a:rPr lang="en-US" sz="4500" dirty="0" spc="-7" kern="0">
-                <a:solidFill>
-                  <a:srgbClr val="14161C"/>
-                </a:solidFill>
-                <a:latin typeface="Bricolage Grotesque ExtraBold" pitchFamily="34" charset="0"/>
-                <a:ea typeface="Bricolage Grotesque ExtraBold" pitchFamily="34" charset="-122"/>
-                <a:cs typeface="Bricolage Grotesque ExtraBold" pitchFamily="34" charset="-120"/>
-              </a:rPr>
-              <a:t> repo</a:t>
-            </a:r>
-            <a:r>
-              <a:rPr lang="en-US" sz="4500" dirty="0" spc="0" kern="0">
-                <a:solidFill>
-                  <a:srgbClr val="14161C"/>
-                </a:solidFill>
-                <a:latin typeface="Bricolage Grotesque ExtraBold" pitchFamily="34" charset="0"/>
-                <a:ea typeface="Bricolage Grotesque ExtraBold" pitchFamily="34" charset="-122"/>
-                <a:cs typeface="Bricolage Grotesque ExtraBold" pitchFamily="34" charset="-120"/>
-              </a:rPr>
-              <a:t> có config.json.</a:t>
-            </a:r>
-            <a:r>
-              <a:rPr lang="en-US" sz="4500" dirty="0" spc="-1" kern="0">
-                <a:solidFill>
-                  <a:srgbClr val="14161C"/>
-                </a:solidFill>
-                <a:latin typeface="Bricolage Grotesque ExtraBold" pitchFamily="34" charset="0"/>
-                <a:ea typeface="Bricolage Grotesque ExtraBold" pitchFamily="34" charset="-122"/>
-                <a:cs typeface="Bricolage Grotesque ExtraBold" pitchFamily="34" charset="-120"/>
-              </a:rPr>
-              <a:t> Vì</a:t>
-            </a:r>
-            <a:r>
-              <a:rPr lang="en-US" sz="4500" dirty="0" spc="-25" kern="0">
-                <a:solidFill>
-                  <a:srgbClr val="14161C"/>
-                </a:solidFill>
-                <a:latin typeface="Bricolage Grotesque ExtraBold" pitchFamily="34" charset="0"/>
-                <a:ea typeface="Bricolage Grotesque ExtraBold" pitchFamily="34" charset="-122"/>
-                <a:cs typeface="Bricolage Grotesque ExtraBold" pitchFamily="34" charset="-120"/>
-              </a:rPr>
-              <a:t> sao?</a:t>
-            </a:r>
-            <a:endParaRPr lang="en-US" sz="4500" dirty="0"/>
+              <a:t> config.json?</a:t>
+            </a:r>
+            <a:endParaRPr lang="en-US" sz="6900" dirty="0"/>
           </a:p>
         </p:txBody>
       </p:sp>
@@ -15066,7 +15000,7 @@
         <p:spPr>
           <a:xfrm>
             <a:off x="914400" y="1295400"/>
-            <a:ext cx="16459200" cy="914400"/>
+            <a:ext cx="16459200" cy="1085850"/>
           </a:xfrm>
           <a:prstGeom prst="rect">
             <a:avLst/>
@@ -15082,7 +15016,7 @@
               <a:buNone/>
             </a:pPr>
             <a:r>
-              <a:rPr lang="en-US" sz="5100" dirty="0" spc="5" kern="0">
+              <a:rPr lang="en-US" sz="6900" dirty="0" spc="0" kern="0">
                 <a:solidFill>
                   <a:srgbClr val="F3EEE3"/>
                 </a:solidFill>
@@ -15093,7 +15027,7 @@
               <a:t>Mỗi</a:t>
             </a:r>
             <a:r>
-              <a:rPr lang="en-US" sz="5100" dirty="0" spc="1" kern="0">
+              <a:rPr lang="en-US" sz="6900" dirty="0" spc="1" kern="0">
                 <a:solidFill>
                   <a:srgbClr val="F3EEE3"/>
                 </a:solidFill>
@@ -15104,7 +15038,7 @@
               <a:t> nguồn,</a:t>
             </a:r>
             <a:r>
-              <a:rPr lang="en-US" sz="5100" dirty="0" spc="-7" kern="0">
+              <a:rPr lang="en-US" sz="6900" dirty="0" spc="-11" kern="0">
                 <a:solidFill>
                   <a:srgbClr val="F3EEE3"/>
                 </a:solidFill>
@@ -15115,7 +15049,7 @@
               <a:t> một</a:t>
             </a:r>
             <a:r>
-              <a:rPr lang="en-US" sz="5100" dirty="0" spc="2" kern="0">
+              <a:rPr lang="en-US" sz="6900" dirty="0" spc="-1" kern="0">
                 <a:solidFill>
                   <a:srgbClr val="F3EEE3"/>
                 </a:solidFill>
@@ -15126,7 +15060,7 @@
               <a:t> việc</a:t>
             </a:r>
             <a:r>
-              <a:rPr lang="en-US" sz="5100" dirty="0" spc="-1" kern="0">
+              <a:rPr lang="en-US" sz="6900" dirty="0" spc="1" kern="0">
                 <a:solidFill>
                   <a:srgbClr val="F3EEE3"/>
                 </a:solidFill>
@@ -15137,7 +15071,7 @@
               <a:t> cụ</a:t>
             </a:r>
             <a:r>
-              <a:rPr lang="en-US" sz="5100" dirty="0" spc="1" kern="0">
+              <a:rPr lang="en-US" sz="6900" dirty="0" spc="2" kern="0">
                 <a:solidFill>
                   <a:srgbClr val="F3EEE3"/>
                 </a:solidFill>
@@ -15147,7 +15081,7 @@
               </a:rPr>
               <a:t> thể</a:t>
             </a:r>
-            <a:endParaRPr lang="en-US" sz="5100" dirty="0"/>
+            <a:endParaRPr lang="en-US" sz="6900" dirty="0"/>
           </a:p>
         </p:txBody>
       </p:sp>

--- a/system-design-101/vi/lessons/sd-13-014/slides/sd-13-014.pptx
+++ b/system-design-101/vi/lessons/sd-13-014/slides/sd-13-014.pptx
@@ -2208,17 +2208,17 @@
           <a:ln/>
         </p:spPr>
         <p:txBody>
-          <a:bodyPr wrap="square" lIns="0" tIns="12144" rIns="0" bIns="-12144" rtlCol="0" anchor="t"/>
+          <a:bodyPr wrap="square" lIns="0" tIns="13764" rIns="0" bIns="-13764" rtlCol="0" anchor="t"/>
           <a:lstStyle/>
           <a:p>
             <a:pPr algn="l" indent="0" marL="0">
               <a:lnSpc>
-                <a:spcPts val="2925"/>
+                <a:spcPts val="3315"/>
               </a:lnSpc>
               <a:buNone/>
             </a:pPr>
             <a:r>
-              <a:rPr lang="en-US" sz="2250" b="1" dirty="0" spc="-1" kern="0">
+              <a:rPr lang="en-US" sz="2550" b="1" dirty="0" spc="-3" kern="0">
                 <a:solidFill>
                   <a:srgbClr val="F3EEE3"/>
                 </a:solidFill>
@@ -2229,7 +2229,7 @@
               <a:t>Phiên</a:t>
             </a:r>
             <a:r>
-              <a:rPr lang="en-US" sz="2250" b="1" dirty="0" spc="1" kern="0">
+              <a:rPr lang="en-US" sz="2550" b="1" dirty="0" spc="0" kern="0">
                 <a:solidFill>
                   <a:srgbClr val="F3EEE3"/>
                 </a:solidFill>
@@ -2240,7 +2240,7 @@
               <a:t> bản</a:t>
             </a:r>
             <a:r>
-              <a:rPr lang="en-US" sz="2250" b="1" dirty="0" spc="-7" kern="0">
+              <a:rPr lang="en-US" sz="2550" b="1" dirty="0" spc="-7" kern="0">
                 <a:solidFill>
                   <a:srgbClr val="F3EEE3"/>
                 </a:solidFill>
@@ -2251,7 +2251,7 @@
               <a:t> công</a:t>
             </a:r>
             <a:r>
-              <a:rPr lang="en-US" sz="2250" b="1" dirty="0" spc="3" kern="0">
+              <a:rPr lang="en-US" sz="2550" b="1" dirty="0" spc="-1" kern="0">
                 <a:solidFill>
                   <a:srgbClr val="F3EEE3"/>
                 </a:solidFill>
@@ -2262,7 +2262,7 @@
               <a:t> cụ</a:t>
             </a:r>
             <a:r>
-              <a:rPr lang="en-US" sz="2250" b="1" dirty="0" spc="-17" kern="0">
+              <a:rPr lang="en-US" sz="2550" b="1" dirty="0" spc="-20" kern="0">
                 <a:solidFill>
                   <a:srgbClr val="F3EEE3"/>
                 </a:solidFill>
@@ -2273,7 +2273,7 @@
               <a:t> và</a:t>
             </a:r>
             <a:r>
-              <a:rPr lang="en-US" sz="2250" b="1" dirty="0" spc="1" kern="0">
+              <a:rPr lang="en-US" sz="2550" b="1" dirty="0" spc="-5" kern="0">
                 <a:solidFill>
                   <a:srgbClr val="F3EEE3"/>
                 </a:solidFill>
@@ -2284,7 +2284,7 @@
               <a:t> phụ</a:t>
             </a:r>
             <a:r>
-              <a:rPr lang="en-US" sz="2250" b="1" dirty="0" spc="0" kern="0">
+              <a:rPr lang="en-US" sz="2550" b="1" dirty="0" spc="0" kern="0">
                 <a:solidFill>
                   <a:srgbClr val="F3EEE3"/>
                 </a:solidFill>
@@ -2294,7 +2294,7 @@
               </a:rPr>
               <a:t> thuộc</a:t>
             </a:r>
-            <a:endParaRPr lang="en-US" sz="2250" dirty="0"/>
+            <a:endParaRPr lang="en-US" sz="2550" dirty="0"/>
           </a:p>
         </p:txBody>
       </p:sp>
@@ -2382,17 +2382,17 @@
           <a:ln/>
         </p:spPr>
         <p:txBody>
-          <a:bodyPr wrap="square" lIns="0" tIns="12144" rIns="0" bIns="-12144" rtlCol="0" anchor="t"/>
+          <a:bodyPr wrap="square" lIns="0" tIns="13764" rIns="0" bIns="-13764" rtlCol="0" anchor="t"/>
           <a:lstStyle/>
           <a:p>
             <a:pPr algn="l" indent="0" marL="0">
               <a:lnSpc>
-                <a:spcPts val="2925"/>
+                <a:spcPts val="3315"/>
               </a:lnSpc>
               <a:buNone/>
             </a:pPr>
             <a:r>
-              <a:rPr lang="en-US" sz="2250" b="1" dirty="0" spc="-2" kern="0">
+              <a:rPr lang="en-US" sz="2550" b="1" dirty="0" spc="-2" kern="0">
                 <a:solidFill>
                   <a:srgbClr val="F3EEE3"/>
                 </a:solidFill>
@@ -2403,7 +2403,7 @@
               <a:t>Môi</a:t>
             </a:r>
             <a:r>
-              <a:rPr lang="en-US" sz="2250" b="1" dirty="0" spc="4" kern="0">
+              <a:rPr lang="en-US" sz="2550" b="1" dirty="0" spc="6" kern="0">
                 <a:solidFill>
                   <a:srgbClr val="F3EEE3"/>
                 </a:solidFill>
@@ -2414,7 +2414,7 @@
               <a:t> trường</a:t>
             </a:r>
             <a:r>
-              <a:rPr lang="en-US" sz="2250" b="1" dirty="0" spc="-3" kern="0">
+              <a:rPr lang="en-US" sz="2550" b="1" dirty="0" spc="-9" kern="0">
                 <a:solidFill>
                   <a:srgbClr val="F3EEE3"/>
                 </a:solidFill>
@@ -2424,7 +2424,7 @@
               </a:rPr>
               <a:t> chạy</a:t>
             </a:r>
-            <a:endParaRPr lang="en-US" sz="2250" dirty="0"/>
+            <a:endParaRPr lang="en-US" sz="2550" dirty="0"/>
           </a:p>
         </p:txBody>
       </p:sp>
@@ -2512,17 +2512,17 @@
           <a:ln/>
         </p:spPr>
         <p:txBody>
-          <a:bodyPr wrap="square" lIns="0" tIns="12144" rIns="0" bIns="-12144" rtlCol="0" anchor="t"/>
+          <a:bodyPr wrap="square" lIns="0" tIns="13764" rIns="0" bIns="-13764" rtlCol="0" anchor="t"/>
           <a:lstStyle/>
           <a:p>
             <a:pPr algn="l" indent="0" marL="0">
               <a:lnSpc>
-                <a:spcPts val="2925"/>
+                <a:spcPts val="3315"/>
               </a:lnSpc>
               <a:buNone/>
             </a:pPr>
             <a:r>
-              <a:rPr lang="en-US" sz="2250" b="1" dirty="0" spc="-34" kern="0">
+              <a:rPr lang="en-US" sz="2550" b="1" dirty="0" spc="-39" kern="0">
                 <a:solidFill>
                   <a:srgbClr val="F3EEE3"/>
                 </a:solidFill>
@@ -2533,7 +2533,7 @@
               <a:t>Trạng</a:t>
             </a:r>
             <a:r>
-              <a:rPr lang="en-US" sz="2250" b="1" dirty="0" spc="2" kern="0">
+              <a:rPr lang="en-US" sz="2550" b="1" dirty="0" spc="1" kern="0">
                 <a:solidFill>
                   <a:srgbClr val="F3EEE3"/>
                 </a:solidFill>
@@ -2544,7 +2544,7 @@
               <a:t> thái</a:t>
             </a:r>
             <a:r>
-              <a:rPr lang="en-US" sz="2250" b="1" dirty="0" spc="-5" kern="0">
+              <a:rPr lang="en-US" sz="2550" b="1" dirty="0" spc="-6" kern="0">
                 <a:solidFill>
                   <a:srgbClr val="F3EEE3"/>
                 </a:solidFill>
@@ -2555,7 +2555,7 @@
               <a:t> còn</a:t>
             </a:r>
             <a:r>
-              <a:rPr lang="en-US" sz="2250" b="1" dirty="0" spc="-6" kern="0">
+              <a:rPr lang="en-US" sz="2550" b="1" dirty="0" spc="-9" kern="0">
                 <a:solidFill>
                   <a:srgbClr val="F3EEE3"/>
                 </a:solidFill>
@@ -2565,7 +2565,7 @@
               </a:rPr>
               <a:t> sót</a:t>
             </a:r>
-            <a:endParaRPr lang="en-US" sz="2250" dirty="0"/>
+            <a:endParaRPr lang="en-US" sz="2550" dirty="0"/>
           </a:p>
         </p:txBody>
       </p:sp>
@@ -2653,17 +2653,17 @@
           <a:ln/>
         </p:spPr>
         <p:txBody>
-          <a:bodyPr wrap="square" lIns="0" tIns="12144" rIns="0" bIns="-12144" rtlCol="0" anchor="t"/>
+          <a:bodyPr wrap="square" lIns="0" tIns="13764" rIns="0" bIns="-13764" rtlCol="0" anchor="t"/>
           <a:lstStyle/>
           <a:p>
             <a:pPr algn="l" indent="0" marL="0">
               <a:lnSpc>
-                <a:spcPts val="2925"/>
+                <a:spcPts val="3315"/>
               </a:lnSpc>
               <a:buNone/>
             </a:pPr>
             <a:r>
-              <a:rPr lang="en-US" sz="2250" b="1" dirty="0" spc="7" kern="0">
+              <a:rPr lang="en-US" sz="2550" b="1" dirty="0" spc="6" kern="0">
                 <a:solidFill>
                   <a:srgbClr val="F3EEE3"/>
                 </a:solidFill>
@@ -2674,7 +2674,7 @@
               <a:t>Cấu</a:t>
             </a:r>
             <a:r>
-              <a:rPr lang="en-US" sz="2250" b="1" dirty="0" spc="3" kern="0">
+              <a:rPr lang="en-US" sz="2550" b="1" dirty="0" spc="-1" kern="0">
                 <a:solidFill>
                   <a:srgbClr val="F3EEE3"/>
                 </a:solidFill>
@@ -2685,7 +2685,7 @@
               <a:t> hình</a:t>
             </a:r>
             <a:r>
-              <a:rPr lang="en-US" sz="2250" b="1" dirty="0" spc="-17" kern="0">
+              <a:rPr lang="en-US" sz="2550" b="1" dirty="0" spc="-20" kern="0">
                 <a:solidFill>
                   <a:srgbClr val="F3EEE3"/>
                 </a:solidFill>
@@ -2696,7 +2696,7 @@
               <a:t> và</a:t>
             </a:r>
             <a:r>
-              <a:rPr lang="en-US" sz="2250" b="1" dirty="0" spc="5" kern="0">
+              <a:rPr lang="en-US" sz="2550" b="1" dirty="0" spc="-1" kern="0">
                 <a:solidFill>
                   <a:srgbClr val="F3EEE3"/>
                 </a:solidFill>
@@ -2707,7 +2707,7 @@
               <a:t> bí</a:t>
             </a:r>
             <a:r>
-              <a:rPr lang="en-US" sz="2250" b="1" dirty="0" spc="-5" kern="0">
+              <a:rPr lang="en-US" sz="2550" b="1" dirty="0" spc="-8" kern="0">
                 <a:solidFill>
                   <a:srgbClr val="F3EEE3"/>
                 </a:solidFill>
@@ -2717,7 +2717,7 @@
               </a:rPr>
               <a:t> mật</a:t>
             </a:r>
-            <a:endParaRPr lang="en-US" sz="2250" dirty="0"/>
+            <a:endParaRPr lang="en-US" sz="2550" dirty="0"/>
           </a:p>
         </p:txBody>
       </p:sp>
@@ -2805,17 +2805,17 @@
           <a:ln/>
         </p:spPr>
         <p:txBody>
-          <a:bodyPr wrap="square" lIns="0" tIns="12144" rIns="0" bIns="-12144" rtlCol="0" anchor="t"/>
+          <a:bodyPr wrap="square" lIns="0" tIns="13764" rIns="0" bIns="-13764" rtlCol="0" anchor="t"/>
           <a:lstStyle/>
           <a:p>
             <a:pPr algn="l" indent="0" marL="0">
               <a:lnSpc>
-                <a:spcPts val="2925"/>
+                <a:spcPts val="3315"/>
               </a:lnSpc>
               <a:buNone/>
             </a:pPr>
             <a:r>
-              <a:rPr lang="en-US" sz="2250" b="1" dirty="0" spc="5" kern="0">
+              <a:rPr lang="en-US" sz="2550" b="1" dirty="0" spc="-2" kern="0">
                 <a:solidFill>
                   <a:srgbClr val="F3EEE3"/>
                 </a:solidFill>
@@ -2823,10 +2823,10 @@
                 <a:ea typeface="Be Vietnam Pro" pitchFamily="34" charset="-122"/>
                 <a:cs typeface="Be Vietnam Pro" pitchFamily="34" charset="-120"/>
               </a:rPr>
-              <a:t>Thứ</a:t>
-            </a:r>
-            <a:r>
-              <a:rPr lang="en-US" sz="2250" b="1" dirty="0" spc="2" kern="0">
+              <a:t>Thứ tự,</a:t>
+            </a:r>
+            <a:r>
+              <a:rPr lang="en-US" sz="2550" b="1" dirty="0" spc="4" kern="0">
                 <a:solidFill>
                   <a:srgbClr val="F3EEE3"/>
                 </a:solidFill>
@@ -2834,10 +2834,10 @@
                 <a:ea typeface="Be Vietnam Pro" pitchFamily="34" charset="-122"/>
                 <a:cs typeface="Be Vietnam Pro" pitchFamily="34" charset="-120"/>
               </a:rPr>
-              <a:t> tự, giờ</a:t>
-            </a:r>
-            <a:r>
-              <a:rPr lang="en-US" sz="2250" b="1" dirty="0" spc="-17" kern="0">
+              <a:t> giờ</a:t>
+            </a:r>
+            <a:r>
+              <a:rPr lang="en-US" sz="2550" b="1" dirty="0" spc="-21" kern="0">
                 <a:solidFill>
                   <a:srgbClr val="F3EEE3"/>
                 </a:solidFill>
@@ -2848,7 +2848,7 @@
               <a:t> và</a:t>
             </a:r>
             <a:r>
-              <a:rPr lang="en-US" sz="2250" b="1" dirty="0" spc="0" kern="0">
+              <a:rPr lang="en-US" sz="2550" b="1" dirty="0" spc="-1" kern="0">
                 <a:solidFill>
                   <a:srgbClr val="F3EEE3"/>
                 </a:solidFill>
@@ -2859,7 +2859,7 @@
               <a:t> tài</a:t>
             </a:r>
             <a:r>
-              <a:rPr lang="en-US" sz="2250" b="1" dirty="0" spc="-14" kern="0">
+              <a:rPr lang="en-US" sz="2550" b="1" dirty="0" spc="-16" kern="0">
                 <a:solidFill>
                   <a:srgbClr val="F3EEE3"/>
                 </a:solidFill>
@@ -2870,7 +2870,7 @@
               <a:t> nguyên</a:t>
             </a:r>
             <a:r>
-              <a:rPr lang="en-US" sz="2250" b="1" dirty="0" spc="-2" kern="0">
+              <a:rPr lang="en-US" sz="2550" b="1" dirty="0" spc="-1" kern="0">
                 <a:solidFill>
                   <a:srgbClr val="F3EEE3"/>
                 </a:solidFill>
@@ -2880,7 +2880,7 @@
               </a:rPr>
               <a:t> chung</a:t>
             </a:r>
-            <a:endParaRPr lang="en-US" sz="2250" dirty="0"/>
+            <a:endParaRPr lang="en-US" sz="2550" dirty="0"/>
           </a:p>
         </p:txBody>
       </p:sp>
@@ -5847,19 +5847,19 @@
           <a:ln/>
         </p:spPr>
         <p:txBody>
-          <a:bodyPr wrap="square" lIns="0" tIns="5334" rIns="0" bIns="-5334" rtlCol="0" anchor="t"/>
+          <a:bodyPr wrap="square" lIns="0" tIns="5667" rIns="0" bIns="-5667" rtlCol="0" anchor="t"/>
           <a:lstStyle/>
           <a:p>
-            <a:pPr algn="l" marL="304800" indent="-217761">
+            <a:pPr algn="l" marL="323850" indent="-231371">
               <a:lnSpc>
-                <a:spcPts val="3360"/>
+                <a:spcPts val="3570"/>
               </a:lnSpc>
               <a:buSzPct val="100000"/>
               <a:buFont typeface="Arial"/>
               <a:buChar char="•"/>
             </a:pPr>
             <a:r>
-              <a:rPr lang="en-US" sz="2400" dirty="0" spc="-12" kern="0">
+              <a:rPr lang="en-US" sz="2550" dirty="0" spc="-12" kern="0">
                 <a:solidFill>
                   <a:srgbClr val="14161C"/>
                 </a:solidFill>
@@ -5870,7 +5870,7 @@
               <a:t>Máy</a:t>
             </a:r>
             <a:r>
-              <a:rPr lang="en-US" sz="2400" dirty="0" spc="0" kern="0">
+              <a:rPr lang="en-US" sz="2550" dirty="0" spc="-3" kern="0">
                 <a:solidFill>
                   <a:srgbClr val="14161C"/>
                 </a:solidFill>
@@ -5881,7 +5881,7 @@
               <a:t> bạn</a:t>
             </a:r>
             <a:r>
-              <a:rPr lang="en-US" sz="2400" dirty="0" spc="-16" kern="0">
+              <a:rPr lang="en-US" sz="2550" dirty="0" spc="-19" kern="0">
                 <a:solidFill>
                   <a:srgbClr val="14161C"/>
                 </a:solidFill>
@@ -5892,7 +5892,7 @@
               <a:t> và</a:t>
             </a:r>
             <a:r>
-              <a:rPr lang="en-US" sz="2400" dirty="0" spc="1" kern="0">
+              <a:rPr lang="en-US" sz="2550" dirty="0" spc="1" kern="0">
                 <a:solidFill>
                   <a:srgbClr val="14161C"/>
                 </a:solidFill>
@@ -5903,7 +5903,7 @@
               <a:t> runner</a:t>
             </a:r>
             <a:r>
-              <a:rPr lang="en-US" sz="2400" dirty="0" spc="-1" kern="0">
+              <a:rPr lang="en-US" sz="2550" dirty="0" spc="-1" kern="0">
                 <a:solidFill>
                   <a:srgbClr val="14161C"/>
                 </a:solidFill>
@@ -5914,7 +5914,7 @@
               <a:t> có</a:t>
             </a:r>
             <a:r>
-              <a:rPr lang="en-US" sz="2400" dirty="0" spc="1" kern="0">
+              <a:rPr lang="en-US" sz="2550" dirty="0" spc="1" kern="0">
                 <a:solidFill>
                   <a:srgbClr val="14161C"/>
                 </a:solidFill>
@@ -5922,10 +5922,10 @@
                 <a:ea typeface="Be Vietnam Pro" pitchFamily="34" charset="-122"/>
                 <a:cs typeface="Be Vietnam Pro" pitchFamily="34" charset="-120"/>
               </a:rPr>
-              <a:t> thể</a:t>
-            </a:r>
-            <a:r>
-              <a:rPr lang="en-US" sz="2400" dirty="0" spc="-1" kern="0">
+              <a:t> thể khác</a:t>
+            </a:r>
+            <a:r>
+              <a:rPr lang="en-US" sz="2550" dirty="0" spc="0" kern="0">
                 <a:solidFill>
                   <a:srgbClr val="14161C"/>
                 </a:solidFill>
@@ -5933,10 +5933,10 @@
                 <a:ea typeface="Be Vietnam Pro" pitchFamily="34" charset="-122"/>
                 <a:cs typeface="Be Vietnam Pro" pitchFamily="34" charset="-120"/>
               </a:rPr>
-              <a:t> khác</a:t>
-            </a:r>
-            <a:r>
-              <a:rPr lang="en-US" sz="2400" dirty="0" spc="0" kern="0">
+              <a:t> phiên</a:t>
+            </a:r>
+            <a:r>
+              <a:rPr lang="en-US" sz="2550" dirty="0" spc="-2" kern="0">
                 <a:solidFill>
                   <a:srgbClr val="14161C"/>
                 </a:solidFill>
@@ -5944,20 +5944,9 @@
                 <a:ea typeface="Be Vietnam Pro" pitchFamily="34" charset="-122"/>
                 <a:cs typeface="Be Vietnam Pro" pitchFamily="34" charset="-120"/>
               </a:rPr>
-              <a:t> phiên</a:t>
-            </a:r>
-            <a:r>
-              <a:rPr lang="en-US" sz="2400" dirty="0" spc="-1" kern="0">
-                <a:solidFill>
-                  <a:srgbClr val="14161C"/>
-                </a:solidFill>
-                <a:latin typeface="Be Vietnam Pro" pitchFamily="34" charset="0"/>
-                <a:ea typeface="Be Vietnam Pro" pitchFamily="34" charset="-122"/>
-                <a:cs typeface="Be Vietnam Pro" pitchFamily="34" charset="-120"/>
-              </a:rPr>
               <a:t> bản.</a:t>
             </a:r>
-            <a:endParaRPr lang="en-US" sz="2400" dirty="0"/>
+            <a:endParaRPr lang="en-US" sz="2550" dirty="0"/>
           </a:p>
         </p:txBody>
       </p:sp>
@@ -6051,19 +6040,19 @@
           <a:ln/>
         </p:spPr>
         <p:txBody>
-          <a:bodyPr wrap="square" lIns="0" tIns="5334" rIns="0" bIns="-5334" rtlCol="0" anchor="t"/>
+          <a:bodyPr wrap="square" lIns="0" tIns="5667" rIns="0" bIns="-5667" rtlCol="0" anchor="t"/>
           <a:lstStyle/>
           <a:p>
-            <a:pPr algn="l" marL="304800" indent="-217761">
+            <a:pPr algn="l" marL="323850" indent="-231371">
               <a:lnSpc>
-                <a:spcPts val="3360"/>
+                <a:spcPts val="3570"/>
               </a:lnSpc>
               <a:buSzPct val="100000"/>
               <a:buFont typeface="Arial"/>
               <a:buChar char="•"/>
             </a:pPr>
             <a:r>
-              <a:rPr lang="en-US" sz="2400" dirty="0" spc="-1" kern="0">
+              <a:rPr lang="en-US" sz="2550" dirty="0" spc="1" kern="0">
                 <a:solidFill>
                   <a:srgbClr val="14161C"/>
                 </a:solidFill>
@@ -6074,7 +6063,7 @@
               <a:t>Cài</a:t>
             </a:r>
             <a:r>
-              <a:rPr lang="en-US" sz="2400" dirty="0" spc="3" kern="0">
+              <a:rPr lang="en-US" sz="2550" dirty="0" spc="-1" kern="0">
                 <a:solidFill>
                   <a:srgbClr val="14161C"/>
                 </a:solidFill>
@@ -6085,7 +6074,7 @@
               <a:t> đúng</a:t>
             </a:r>
             <a:r>
-              <a:rPr lang="en-US" sz="2400" dirty="0" spc="-1" kern="0">
+              <a:rPr lang="en-US" sz="2550" dirty="0" spc="-2" kern="0">
                 <a:solidFill>
                   <a:srgbClr val="14161C"/>
                 </a:solidFill>
@@ -6096,7 +6085,7 @@
               <a:t> theo</a:t>
             </a:r>
             <a:r>
-              <a:rPr lang="en-US" sz="2400" dirty="0" spc="-10" kern="0">
+              <a:rPr lang="en-US" sz="2550" dirty="0" spc="-11" kern="0">
                 <a:solidFill>
                   <a:srgbClr val="14161C"/>
                 </a:solidFill>
@@ -6107,7 +6096,7 @@
               <a:t> tệp</a:t>
             </a:r>
             <a:r>
-              <a:rPr lang="en-US" sz="2400" dirty="0" spc="-2" kern="0">
+              <a:rPr lang="en-US" sz="2550" dirty="0" spc="-3" kern="0">
                 <a:solidFill>
                   <a:srgbClr val="14161C"/>
                 </a:solidFill>
@@ -6118,7 +6107,7 @@
               <a:t> khóa,</a:t>
             </a:r>
             <a:r>
-              <a:rPr lang="en-US" sz="2400" dirty="0" spc="0" kern="0">
+              <a:rPr lang="en-US" sz="2550" dirty="0" spc="-2" kern="0">
                 <a:solidFill>
                   <a:srgbClr val="14161C"/>
                 </a:solidFill>
@@ -6129,7 +6118,7 @@
               <a:t> như</a:t>
             </a:r>
             <a:r>
-              <a:rPr lang="en-US" sz="2400" dirty="0" spc="2" kern="0">
+              <a:rPr lang="en-US" sz="2550" dirty="0" spc="0" kern="0">
                 <a:solidFill>
                   <a:srgbClr val="14161C"/>
                 </a:solidFill>
@@ -6140,7 +6129,7 @@
               <a:t> npm</a:t>
             </a:r>
             <a:r>
-              <a:rPr lang="en-US" sz="2400" dirty="0" spc="-1" kern="0">
+              <a:rPr lang="en-US" sz="2550" dirty="0" spc="1" kern="0">
                 <a:solidFill>
                   <a:srgbClr val="14161C"/>
                 </a:solidFill>
@@ -6150,7 +6139,7 @@
               </a:rPr>
               <a:t> ci.</a:t>
             </a:r>
-            <a:endParaRPr lang="en-US" sz="2400" dirty="0"/>
+            <a:endParaRPr lang="en-US" sz="2550" dirty="0"/>
           </a:p>
         </p:txBody>
       </p:sp>
@@ -6343,12 +6332,12 @@
           <a:ln/>
         </p:spPr>
         <p:txBody>
-          <a:bodyPr wrap="square" lIns="0" tIns="5334" rIns="0" bIns="-5334" rtlCol="0" anchor="t"/>
+          <a:bodyPr wrap="square" lIns="0" tIns="5667" rIns="0" bIns="-5667" rtlCol="0" anchor="t"/>
           <a:lstStyle/>
           <a:p>
-            <a:pPr algn="l" marL="304800" indent="-217761">
+            <a:pPr algn="l" marL="323850" indent="-231371">
               <a:lnSpc>
-                <a:spcPts val="3360"/>
+                <a:spcPts val="3570"/>
               </a:lnSpc>
               <a:spcAft>
                 <a:spcPts val="600"/>
@@ -6358,7 +6347,7 @@
               <a:buChar char="•"/>
             </a:pPr>
             <a:r>
-              <a:rPr lang="en-US" sz="2400" dirty="0" spc="-14" kern="0">
+              <a:rPr lang="en-US" sz="2550" dirty="0" spc="-12" kern="0">
                 <a:solidFill>
                   <a:srgbClr val="14161C"/>
                 </a:solidFill>
@@ -6369,7 +6358,7 @@
               <a:t>ubuntu-latest</a:t>
             </a:r>
             <a:r>
-              <a:rPr lang="en-US" sz="2400" dirty="0" spc="2" kern="0">
+              <a:rPr lang="en-US" sz="2550" dirty="0" spc="1" kern="0">
                 <a:solidFill>
                   <a:srgbClr val="14161C"/>
                 </a:solidFill>
@@ -6377,10 +6366,10 @@
                 <a:ea typeface="Be Vietnam Pro" pitchFamily="34" charset="-122"/>
                 <a:cs typeface="Be Vietnam Pro" pitchFamily="34" charset="-120"/>
               </a:rPr>
-              <a:t> có</a:t>
-            </a:r>
-            <a:r>
-              <a:rPr lang="en-US" sz="2400" dirty="0" spc="0" kern="0">
+              <a:t> có thể</a:t>
+            </a:r>
+            <a:r>
+              <a:rPr lang="en-US" sz="2550" dirty="0" spc="13" kern="0">
                 <a:solidFill>
                   <a:srgbClr val="14161C"/>
                 </a:solidFill>
@@ -6388,10 +6377,10 @@
                 <a:ea typeface="Be Vietnam Pro" pitchFamily="34" charset="-122"/>
                 <a:cs typeface="Be Vietnam Pro" pitchFamily="34" charset="-120"/>
               </a:rPr>
-              <a:t> thể</a:t>
-            </a:r>
-            <a:r>
-              <a:rPr lang="en-US" sz="2400" dirty="0" spc="13" kern="0">
+              <a:t> đổi</a:t>
+            </a:r>
+            <a:r>
+              <a:rPr lang="en-US" sz="2550" dirty="0" spc="0" kern="0">
                 <a:solidFill>
                   <a:srgbClr val="14161C"/>
                 </a:solidFill>
@@ -6399,10 +6388,10 @@
                 <a:ea typeface="Be Vietnam Pro" pitchFamily="34" charset="-122"/>
                 <a:cs typeface="Be Vietnam Pro" pitchFamily="34" charset="-120"/>
               </a:rPr>
-              <a:t> đổi</a:t>
-            </a:r>
-            <a:r>
-              <a:rPr lang="en-US" sz="2400" dirty="0" spc="0" kern="0">
+              <a:t> hệ</a:t>
+            </a:r>
+            <a:r>
+              <a:rPr lang="en-US" sz="2550" dirty="0" spc="22" kern="0">
                 <a:solidFill>
                   <a:srgbClr val="14161C"/>
                 </a:solidFill>
@@ -6410,10 +6399,10 @@
                 <a:ea typeface="Be Vietnam Pro" pitchFamily="34" charset="-122"/>
                 <a:cs typeface="Be Vietnam Pro" pitchFamily="34" charset="-120"/>
               </a:rPr>
-              <a:t> hệ</a:t>
-            </a:r>
-            <a:r>
-              <a:rPr lang="en-US" sz="2400" dirty="0" spc="18" kern="0">
+              <a:t> điều</a:t>
+            </a:r>
+            <a:r>
+              <a:rPr lang="en-US" sz="2550" dirty="0" spc="0" kern="0">
                 <a:solidFill>
                   <a:srgbClr val="14161C"/>
                 </a:solidFill>
@@ -6421,32 +6410,21 @@
                 <a:ea typeface="Be Vietnam Pro" pitchFamily="34" charset="-122"/>
                 <a:cs typeface="Be Vietnam Pro" pitchFamily="34" charset="-120"/>
               </a:rPr>
-              <a:t> điều</a:t>
-            </a:r>
-            <a:r>
-              <a:rPr lang="en-US" sz="2400" dirty="0" spc="1" kern="0">
-                <a:solidFill>
-                  <a:srgbClr val="14161C"/>
-                </a:solidFill>
-                <a:latin typeface="Be Vietnam Pro" pitchFamily="34" charset="0"/>
-                <a:ea typeface="Be Vietnam Pro" pitchFamily="34" charset="-122"/>
-                <a:cs typeface="Be Vietnam Pro" pitchFamily="34" charset="-120"/>
-              </a:rPr>
               <a:t> hành.</a:t>
             </a:r>
-            <a:endParaRPr lang="en-US" sz="2400" dirty="0"/>
+            <a:endParaRPr lang="en-US" sz="2550" dirty="0"/>
           </a:p>
           <a:p>
-            <a:pPr algn="l" marL="304800" indent="-217761">
+            <a:pPr algn="l" marL="323850" indent="-231371">
               <a:lnSpc>
-                <a:spcPts val="3360"/>
+                <a:spcPts val="3570"/>
               </a:lnSpc>
               <a:buSzPct val="100000"/>
               <a:buFont typeface="Arial"/>
               <a:buChar char="•"/>
             </a:pPr>
             <a:r>
-              <a:rPr lang="en-US" sz="2400" dirty="0" spc="0" kern="0">
+              <a:rPr lang="en-US" sz="2550" dirty="0" spc="1" kern="0">
                 <a:solidFill>
                   <a:srgbClr val="14161C"/>
                 </a:solidFill>
@@ -6454,10 +6432,10 @@
                 <a:ea typeface="Be Vietnam Pro" pitchFamily="34" charset="-122"/>
                 <a:cs typeface="Be Vietnam Pro" pitchFamily="34" charset="-120"/>
               </a:rPr>
-              <a:t>Nhãn có</a:t>
-            </a:r>
-            <a:r>
-              <a:rPr lang="en-US" sz="2400" dirty="0" spc="-9" kern="0">
+              <a:t>Nhãn</a:t>
+            </a:r>
+            <a:r>
+              <a:rPr lang="en-US" sz="2550" dirty="0" spc="0" kern="0">
                 <a:solidFill>
                   <a:srgbClr val="14161C"/>
                 </a:solidFill>
@@ -6465,10 +6443,21 @@
                 <a:ea typeface="Be Vietnam Pro" pitchFamily="34" charset="-122"/>
                 <a:cs typeface="Be Vietnam Pro" pitchFamily="34" charset="-120"/>
               </a:rPr>
+              <a:t> có</a:t>
+            </a:r>
+            <a:r>
+              <a:rPr lang="en-US" sz="2550" dirty="0" spc="-10" kern="0">
+                <a:solidFill>
+                  <a:srgbClr val="14161C"/>
+                </a:solidFill>
+                <a:latin typeface="Be Vietnam Pro" pitchFamily="34" charset="0"/>
+                <a:ea typeface="Be Vietnam Pro" pitchFamily="34" charset="-122"/>
+                <a:cs typeface="Be Vietnam Pro" pitchFamily="34" charset="-120"/>
+              </a:rPr>
               <a:t> số</a:t>
             </a:r>
             <a:r>
-              <a:rPr lang="en-US" sz="2400" dirty="0" spc="-1" kern="0">
+              <a:rPr lang="en-US" sz="2550" dirty="0" spc="0" kern="0">
                 <a:solidFill>
                   <a:srgbClr val="14161C"/>
                 </a:solidFill>
@@ -6479,7 +6468,7 @@
               <a:t> chỉ</a:t>
             </a:r>
             <a:r>
-              <a:rPr lang="en-US" sz="2400" dirty="0" spc="2" kern="0">
+              <a:rPr lang="en-US" sz="2550" dirty="0" spc="1" kern="0">
                 <a:solidFill>
                   <a:srgbClr val="14161C"/>
                 </a:solidFill>
@@ -6490,7 +6479,7 @@
               <a:t> ghim</a:t>
             </a:r>
             <a:r>
-              <a:rPr lang="en-US" sz="2400" dirty="0" spc="0" kern="0">
+              <a:rPr lang="en-US" sz="2550" dirty="0" spc="0" kern="0">
                 <a:solidFill>
                   <a:srgbClr val="14161C"/>
                 </a:solidFill>
@@ -6501,7 +6490,7 @@
               <a:t> hệ</a:t>
             </a:r>
             <a:r>
-              <a:rPr lang="en-US" sz="2400" dirty="0" spc="18" kern="0">
+              <a:rPr lang="en-US" sz="2550" dirty="0" spc="21" kern="0">
                 <a:solidFill>
                   <a:srgbClr val="14161C"/>
                 </a:solidFill>
@@ -6512,7 +6501,7 @@
               <a:t> điều</a:t>
             </a:r>
             <a:r>
-              <a:rPr lang="en-US" sz="2400" dirty="0" spc="1" kern="0">
+              <a:rPr lang="en-US" sz="2550" dirty="0" spc="1" kern="0">
                 <a:solidFill>
                   <a:srgbClr val="14161C"/>
                 </a:solidFill>
@@ -6522,7 +6511,7 @@
               </a:rPr>
               <a:t> hành.</a:t>
             </a:r>
-            <a:endParaRPr lang="en-US" sz="2400" dirty="0"/>
+            <a:endParaRPr lang="en-US" sz="2550" dirty="0"/>
           </a:p>
         </p:txBody>
       </p:sp>
@@ -6616,12 +6605,12 @@
           <a:ln/>
         </p:spPr>
         <p:txBody>
-          <a:bodyPr wrap="square" lIns="0" tIns="5334" rIns="0" bIns="-5334" rtlCol="0" anchor="t"/>
+          <a:bodyPr wrap="square" lIns="0" tIns="5667" rIns="0" bIns="-5667" rtlCol="0" anchor="t"/>
           <a:lstStyle/>
           <a:p>
-            <a:pPr algn="l" marL="304800" indent="-217761">
+            <a:pPr algn="l" marL="323850" indent="-231371">
               <a:lnSpc>
-                <a:spcPts val="3360"/>
+                <a:spcPts val="3570"/>
               </a:lnSpc>
               <a:spcAft>
                 <a:spcPts val="600"/>
@@ -6631,7 +6620,7 @@
               <a:buChar char="•"/>
             </a:pPr>
             <a:r>
-              <a:rPr lang="en-US" sz="2400" dirty="0" spc="-1" kern="0">
+              <a:rPr lang="en-US" sz="2550" dirty="0" spc="1" kern="0">
                 <a:solidFill>
                   <a:srgbClr val="14161C"/>
                 </a:solidFill>
@@ -6642,7 +6631,7 @@
               <a:t>Chỉ</a:t>
             </a:r>
             <a:r>
-              <a:rPr lang="en-US" sz="2400" dirty="0" spc="20" kern="0">
+              <a:rPr lang="en-US" sz="2550" dirty="0" spc="21" kern="0">
                 <a:solidFill>
                   <a:srgbClr val="14161C"/>
                 </a:solidFill>
@@ -6653,7 +6642,7 @@
               <a:t> định</a:t>
             </a:r>
             <a:r>
-              <a:rPr lang="en-US" sz="2400" dirty="0" spc="0" kern="0">
+              <a:rPr lang="en-US" sz="2550" dirty="0" spc="0" kern="0">
                 <a:solidFill>
                   <a:srgbClr val="14161C"/>
                 </a:solidFill>
@@ -6664,7 +6653,7 @@
               <a:t> phiên</a:t>
             </a:r>
             <a:r>
-              <a:rPr lang="en-US" sz="2400" dirty="0" spc="-1" kern="0">
+              <a:rPr lang="en-US" sz="2550" dirty="0" spc="-4" kern="0">
                 <a:solidFill>
                   <a:srgbClr val="14161C"/>
                 </a:solidFill>
@@ -6675,7 +6664,7 @@
               <a:t> bản</a:t>
             </a:r>
             <a:r>
-              <a:rPr lang="en-US" sz="2400" dirty="0" spc="22" kern="0">
+              <a:rPr lang="en-US" sz="2550" dirty="0" spc="20" kern="0">
                 <a:solidFill>
                   <a:srgbClr val="14161C"/>
                 </a:solidFill>
@@ -6686,7 +6675,7 @@
               <a:t> từng</a:t>
             </a:r>
             <a:r>
-              <a:rPr lang="en-US" sz="2400" dirty="0" spc="1" kern="0">
+              <a:rPr lang="en-US" sz="2550" dirty="0" spc="0" kern="0">
                 <a:solidFill>
                   <a:srgbClr val="14161C"/>
                 </a:solidFill>
@@ -6696,19 +6685,19 @@
               </a:rPr>
               <a:t> công cụ.</a:t>
             </a:r>
-            <a:endParaRPr lang="en-US" sz="2400" dirty="0"/>
+            <a:endParaRPr lang="en-US" sz="2550" dirty="0"/>
           </a:p>
           <a:p>
-            <a:pPr algn="l" marL="304800" indent="-217761">
+            <a:pPr algn="l" marL="323850" indent="-231371">
               <a:lnSpc>
-                <a:spcPts val="3360"/>
+                <a:spcPts val="3570"/>
               </a:lnSpc>
               <a:buSzPct val="100000"/>
               <a:buFont typeface="Arial"/>
               <a:buChar char="•"/>
             </a:pPr>
             <a:r>
-              <a:rPr lang="en-US" sz="2400" dirty="0" spc="-2" kern="0">
+              <a:rPr lang="en-US" sz="2550" dirty="0" spc="-4" kern="0">
                 <a:solidFill>
                   <a:srgbClr val="14161C"/>
                 </a:solidFill>
@@ -6719,7 +6708,7 @@
               <a:t>Hoặc</a:t>
             </a:r>
             <a:r>
-              <a:rPr lang="en-US" sz="2400" dirty="0" spc="-7" kern="0">
+              <a:rPr lang="en-US" sz="2550" dirty="0" spc="-7" kern="0">
                 <a:solidFill>
                   <a:srgbClr val="14161C"/>
                 </a:solidFill>
@@ -6730,7 +6719,7 @@
               <a:t> chạy</a:t>
             </a:r>
             <a:r>
-              <a:rPr lang="en-US" sz="2400" dirty="0" spc="-9" kern="0">
+              <a:rPr lang="en-US" sz="2550" dirty="0" spc="-10" kern="0">
                 <a:solidFill>
                   <a:srgbClr val="14161C"/>
                 </a:solidFill>
@@ -6741,7 +6730,7 @@
               <a:t> container</a:t>
             </a:r>
             <a:r>
-              <a:rPr lang="en-US" sz="2400" dirty="0" spc="2" kern="0">
+              <a:rPr lang="en-US" sz="2550" dirty="0" spc="0" kern="0">
                 <a:solidFill>
                   <a:srgbClr val="14161C"/>
                 </a:solidFill>
@@ -6752,7 +6741,7 @@
               <a:t> ghim</a:t>
             </a:r>
             <a:r>
-              <a:rPr lang="en-US" sz="2400" dirty="0" spc="-1" kern="0">
+              <a:rPr lang="en-US" sz="2550" dirty="0" spc="-2" kern="0">
                 <a:solidFill>
                   <a:srgbClr val="14161C"/>
                 </a:solidFill>
@@ -6763,7 +6752,7 @@
               <a:t> theo</a:t>
             </a:r>
             <a:r>
-              <a:rPr lang="en-US" sz="2400" dirty="0" spc="-9" kern="0">
+              <a:rPr lang="en-US" sz="2550" dirty="0" spc="-9" kern="0">
                 <a:solidFill>
                   <a:srgbClr val="14161C"/>
                 </a:solidFill>
@@ -6773,7 +6762,7 @@
               </a:rPr>
               <a:t> digest.</a:t>
             </a:r>
-            <a:endParaRPr lang="en-US" sz="2400" dirty="0"/>
+            <a:endParaRPr lang="en-US" sz="2550" dirty="0"/>
           </a:p>
         </p:txBody>
       </p:sp>
@@ -7674,17 +7663,17 @@
           <a:ln/>
         </p:spPr>
         <p:txBody>
-          <a:bodyPr wrap="square" lIns="0" tIns="9144" rIns="0" bIns="-9144" rtlCol="0" anchor="t"/>
+          <a:bodyPr wrap="square" lIns="0" tIns="9700" rIns="0" bIns="-9700" rtlCol="0" anchor="t"/>
           <a:lstStyle/>
           <a:p>
             <a:pPr algn="l" indent="0" marL="0">
               <a:lnSpc>
-                <a:spcPts val="3240"/>
+                <a:spcPts val="3443"/>
               </a:lnSpc>
               <a:buNone/>
             </a:pPr>
             <a:r>
-              <a:rPr lang="en-US" sz="2400" dirty="0" spc="1" kern="0">
+              <a:rPr lang="en-US" sz="2550" dirty="0" spc="-4" kern="0">
                 <a:solidFill>
                   <a:srgbClr val="E4E1D8"/>
                 </a:solidFill>
@@ -7695,7 +7684,7 @@
               <a:t>Thứ</a:t>
             </a:r>
             <a:r>
-              <a:rPr lang="en-US" sz="2400" dirty="0" spc="0" kern="0">
+              <a:rPr lang="en-US" sz="2550" dirty="0" spc="0" kern="0">
                 <a:solidFill>
                   <a:srgbClr val="E4E1D8"/>
                 </a:solidFill>
@@ -7706,7 +7695,7 @@
               <a:t> còn</a:t>
             </a:r>
             <a:r>
-              <a:rPr lang="en-US" sz="2400" dirty="0" spc="-12" kern="0">
+              <a:rPr lang="en-US" sz="2550" dirty="0" spc="-13" kern="0">
                 <a:solidFill>
                   <a:srgbClr val="E4E1D8"/>
                 </a:solidFill>
@@ -7717,7 +7706,7 @@
               <a:t> sót</a:t>
             </a:r>
             <a:r>
-              <a:rPr lang="en-US" sz="2400" dirty="0" spc="0" kern="0">
+              <a:rPr lang="en-US" sz="2550" dirty="0" spc="-1" kern="0">
                 <a:solidFill>
                   <a:srgbClr val="E4E1D8"/>
                 </a:solidFill>
@@ -7728,7 +7717,7 @@
               <a:t> có</a:t>
             </a:r>
             <a:r>
-              <a:rPr lang="en-US" sz="2400" dirty="0" spc="1" kern="0">
+              <a:rPr lang="en-US" sz="2550" dirty="0" spc="2" kern="0">
                 <a:solidFill>
                   <a:srgbClr val="E4E1D8"/>
                 </a:solidFill>
@@ -7739,7 +7728,7 @@
               <a:t> thể</a:t>
             </a:r>
             <a:r>
-              <a:rPr lang="en-US" sz="2400" dirty="0" spc="-1" kern="0">
+              <a:rPr lang="en-US" sz="2550" dirty="0" spc="0" kern="0">
                 <a:solidFill>
                   <a:srgbClr val="E4E1D8"/>
                 </a:solidFill>
@@ -7747,20 +7736,9 @@
                 <a:ea typeface="Be Vietnam Pro" pitchFamily="34" charset="-122"/>
                 <a:cs typeface="Be Vietnam Pro" pitchFamily="34" charset="-120"/>
               </a:rPr>
-              <a:t> che</a:t>
-            </a:r>
-            <a:r>
-              <a:rPr lang="en-US" sz="2400" dirty="0" spc="0" kern="0">
-                <a:solidFill>
-                  <a:srgbClr val="E4E1D8"/>
-                </a:solidFill>
-                <a:latin typeface="Be Vietnam Pro" pitchFamily="34" charset="0"/>
-                <a:ea typeface="Be Vietnam Pro" pitchFamily="34" charset="-122"/>
-                <a:cs typeface="Be Vietnam Pro" pitchFamily="34" charset="-120"/>
-              </a:rPr>
-              <a:t> lỗi.</a:t>
-            </a:r>
-            <a:endParaRPr lang="en-US" sz="2400" dirty="0"/>
+              <a:t> che lỗi.</a:t>
+            </a:r>
+            <a:endParaRPr lang="en-US" sz="2550" dirty="0"/>
           </a:p>
         </p:txBody>
       </p:sp>
@@ -7892,17 +7870,17 @@
           <a:ln/>
         </p:spPr>
         <p:txBody>
-          <a:bodyPr wrap="square" lIns="0" tIns="12954" rIns="0" bIns="-12954" rtlCol="0" anchor="ctr"/>
+          <a:bodyPr wrap="square" lIns="0" tIns="13764" rIns="0" bIns="-13764" rtlCol="0" anchor="ctr"/>
           <a:lstStyle/>
           <a:p>
             <a:pPr algn="l" indent="0" marL="0">
               <a:lnSpc>
-                <a:spcPts val="3120"/>
+                <a:spcPts val="3315"/>
               </a:lnSpc>
               <a:buNone/>
             </a:pPr>
             <a:r>
-              <a:rPr lang="en-US" sz="2400" b="1" dirty="0" spc="-9" kern="0">
+              <a:rPr lang="en-US" sz="2550" b="1" dirty="0" spc="-9" kern="0">
                 <a:solidFill>
                   <a:srgbClr val="F3EEE3"/>
                 </a:solidFill>
@@ -7913,7 +7891,7 @@
               <a:t>Clone</a:t>
             </a:r>
             <a:r>
-              <a:rPr lang="en-US" sz="2400" b="1" dirty="0" spc="3" kern="0">
+              <a:rPr lang="en-US" sz="2550" b="1" dirty="0" spc="3" kern="0">
                 <a:solidFill>
                   <a:srgbClr val="F3EEE3"/>
                 </a:solidFill>
@@ -7923,7 +7901,7 @@
               </a:rPr>
               <a:t> mới</a:t>
             </a:r>
-            <a:endParaRPr lang="en-US" sz="2400" dirty="0"/>
+            <a:endParaRPr lang="en-US" sz="2550" dirty="0"/>
           </a:p>
         </p:txBody>
       </p:sp>
@@ -7997,17 +7975,17 @@
           <a:ln/>
         </p:spPr>
         <p:txBody>
-          <a:bodyPr wrap="square" lIns="0" tIns="12954" rIns="0" bIns="-12954" rtlCol="0" anchor="ctr"/>
+          <a:bodyPr wrap="square" lIns="0" tIns="13764" rIns="0" bIns="-13764" rtlCol="0" anchor="ctr"/>
           <a:lstStyle/>
           <a:p>
             <a:pPr algn="l" indent="0" marL="0">
               <a:lnSpc>
-                <a:spcPts val="3120"/>
+                <a:spcPts val="3315"/>
               </a:lnSpc>
               <a:buNone/>
             </a:pPr>
             <a:r>
-              <a:rPr lang="en-US" sz="2400" b="1" dirty="0" spc="-4" kern="0">
+              <a:rPr lang="en-US" sz="2550" b="1" dirty="0" spc="-1" kern="0">
                 <a:solidFill>
                   <a:srgbClr val="F3EEE3"/>
                 </a:solidFill>
@@ -8015,10 +7993,10 @@
                 <a:ea typeface="Be Vietnam Pro" pitchFamily="34" charset="-122"/>
                 <a:cs typeface="Be Vietnam Pro" pitchFamily="34" charset="-120"/>
               </a:rPr>
-              <a:t>Thư</a:t>
-            </a:r>
-            <a:r>
-              <a:rPr lang="en-US" sz="2400" b="1" dirty="0" spc="1" kern="0">
+              <a:t>Thư mục</a:t>
+            </a:r>
+            <a:r>
+              <a:rPr lang="en-US" sz="2550" b="1" dirty="0" spc="2" kern="0">
                 <a:solidFill>
                   <a:srgbClr val="F3EEE3"/>
                 </a:solidFill>
@@ -8026,20 +8004,9 @@
                 <a:ea typeface="Be Vietnam Pro" pitchFamily="34" charset="-122"/>
                 <a:cs typeface="Be Vietnam Pro" pitchFamily="34" charset="-120"/>
               </a:rPr>
-              <a:t> mục</a:t>
-            </a:r>
-            <a:r>
-              <a:rPr lang="en-US" sz="2400" b="1" dirty="0" spc="0" kern="0">
-                <a:solidFill>
-                  <a:srgbClr val="F3EEE3"/>
-                </a:solidFill>
-                <a:latin typeface="Be Vietnam Pro" pitchFamily="34" charset="0"/>
-                <a:ea typeface="Be Vietnam Pro" pitchFamily="34" charset="-122"/>
-                <a:cs typeface="Be Vietnam Pro" pitchFamily="34" charset="-120"/>
-              </a:rPr>
               <a:t> khác</a:t>
             </a:r>
-            <a:endParaRPr lang="en-US" sz="2400" dirty="0"/>
+            <a:endParaRPr lang="en-US" sz="2550" dirty="0"/>
           </a:p>
         </p:txBody>
       </p:sp>
@@ -8113,17 +8080,17 @@
           <a:ln/>
         </p:spPr>
         <p:txBody>
-          <a:bodyPr wrap="square" lIns="0" tIns="12954" rIns="0" bIns="-12954" rtlCol="0" anchor="ctr"/>
+          <a:bodyPr wrap="square" lIns="0" tIns="13764" rIns="0" bIns="-13764" rtlCol="0" anchor="ctr"/>
           <a:lstStyle/>
           <a:p>
             <a:pPr algn="l" indent="0" marL="0">
               <a:lnSpc>
-                <a:spcPts val="3120"/>
+                <a:spcPts val="3315"/>
               </a:lnSpc>
               <a:buNone/>
             </a:pPr>
             <a:r>
-              <a:rPr lang="en-US" sz="2400" b="1" dirty="0" spc="-13" kern="0">
+              <a:rPr lang="en-US" sz="2550" b="1" dirty="0" spc="-11" kern="0">
                 <a:solidFill>
                   <a:srgbClr val="F3EEE3"/>
                 </a:solidFill>
@@ -8134,7 +8101,7 @@
               <a:t>Chạy</a:t>
             </a:r>
             <a:r>
-              <a:rPr lang="en-US" sz="2400" b="1" dirty="0" spc="0" kern="0">
+              <a:rPr lang="en-US" sz="2550" b="1" dirty="0" spc="-1" kern="0">
                 <a:solidFill>
                   <a:srgbClr val="F3EEE3"/>
                 </a:solidFill>
@@ -8145,7 +8112,7 @@
               <a:t> lại</a:t>
             </a:r>
             <a:r>
-              <a:rPr lang="en-US" sz="2400" b="1" dirty="0" spc="-8" kern="0">
+              <a:rPr lang="en-US" sz="2550" b="1" dirty="0" spc="-8" kern="0">
                 <a:solidFill>
                   <a:srgbClr val="F3EEE3"/>
                 </a:solidFill>
@@ -8155,7 +8122,7 @@
               </a:rPr>
               <a:t> test</a:t>
             </a:r>
-            <a:endParaRPr lang="en-US" sz="2400" dirty="0"/>
+            <a:endParaRPr lang="en-US" sz="2550" dirty="0"/>
           </a:p>
         </p:txBody>
       </p:sp>
@@ -8229,17 +8196,17 @@
           <a:ln/>
         </p:spPr>
         <p:txBody>
-          <a:bodyPr wrap="square" lIns="0" tIns="12954" rIns="0" bIns="-12954" rtlCol="0" anchor="ctr"/>
+          <a:bodyPr wrap="square" lIns="0" tIns="13764" rIns="0" bIns="-13764" rtlCol="0" anchor="ctr"/>
           <a:lstStyle/>
           <a:p>
             <a:pPr algn="l" indent="0" marL="0">
               <a:lnSpc>
-                <a:spcPts val="3120"/>
+                <a:spcPts val="3315"/>
               </a:lnSpc>
               <a:buNone/>
             </a:pPr>
             <a:r>
-              <a:rPr lang="en-US" sz="2400" b="1" dirty="0" spc="-20" kern="0">
+              <a:rPr lang="en-US" sz="2550" b="1" dirty="0" spc="-21" kern="0">
                 <a:solidFill>
                   <a:srgbClr val="FF6A4D"/>
                 </a:solidFill>
@@ -8250,7 +8217,7 @@
               <a:t>Lỗi</a:t>
             </a:r>
             <a:r>
-              <a:rPr lang="en-US" sz="2400" b="1" dirty="0" spc="-5" kern="0">
+              <a:rPr lang="en-US" sz="2550" b="1" dirty="0" spc="-2" kern="0">
                 <a:solidFill>
                   <a:srgbClr val="FF6A4D"/>
                 </a:solidFill>
@@ -8261,7 +8228,7 @@
               <a:t> hiện</a:t>
             </a:r>
             <a:r>
-              <a:rPr lang="en-US" sz="2400" b="1" dirty="0" spc="-9" kern="0">
+              <a:rPr lang="en-US" sz="2550" b="1" dirty="0" spc="-14" kern="0">
                 <a:solidFill>
                   <a:srgbClr val="FF6A4D"/>
                 </a:solidFill>
@@ -8272,7 +8239,7 @@
               <a:t> ra:</a:t>
             </a:r>
             <a:r>
-              <a:rPr lang="en-US" sz="2400" b="1" dirty="0" spc="-11" kern="0">
+              <a:rPr lang="en-US" sz="2550" b="1" dirty="0" spc="-12" kern="0">
                 <a:solidFill>
                   <a:srgbClr val="FF6A4D"/>
                 </a:solidFill>
@@ -8283,7 +8250,7 @@
               <a:t> máy</a:t>
             </a:r>
             <a:r>
-              <a:rPr lang="en-US" sz="2400" b="1" dirty="0" spc="1" kern="0">
+              <a:rPr lang="en-US" sz="2550" b="1" dirty="0" spc="0" kern="0">
                 <a:solidFill>
                   <a:srgbClr val="FF6A4D"/>
                 </a:solidFill>
@@ -8294,7 +8261,7 @@
               <a:t> bạn</a:t>
             </a:r>
             <a:r>
-              <a:rPr lang="en-US" sz="2400" b="1" dirty="0" spc="3" kern="0">
+              <a:rPr lang="en-US" sz="2550" b="1" dirty="0" spc="3" kern="0">
                 <a:solidFill>
                   <a:srgbClr val="FF6A4D"/>
                 </a:solidFill>
@@ -8305,7 +8272,7 @@
               <a:t> đang</a:t>
             </a:r>
             <a:r>
-              <a:rPr lang="en-US" sz="2400" b="1" dirty="0" spc="-6" kern="0">
+              <a:rPr lang="en-US" sz="2550" b="1" dirty="0" spc="-3" kern="0">
                 <a:solidFill>
                   <a:srgbClr val="FF6A4D"/>
                 </a:solidFill>
@@ -8316,7 +8283,7 @@
               <a:t> che</a:t>
             </a:r>
             <a:r>
-              <a:rPr lang="en-US" sz="2400" b="1" dirty="0" spc="-4" kern="0">
+              <a:rPr lang="en-US" sz="2550" b="1" dirty="0" spc="-4" kern="0">
                 <a:solidFill>
                   <a:srgbClr val="FF6A4D"/>
                 </a:solidFill>
@@ -8326,7 +8293,7 @@
               </a:rPr>
               <a:t> nó</a:t>
             </a:r>
-            <a:endParaRPr lang="en-US" sz="2400" dirty="0"/>
+            <a:endParaRPr lang="en-US" sz="2550" dirty="0"/>
           </a:p>
         </p:txBody>
       </p:sp>
@@ -9063,17 +9030,17 @@
           <a:ln/>
         </p:spPr>
         <p:txBody>
-          <a:bodyPr wrap="square" lIns="0" tIns="9144" rIns="0" bIns="-9144" rtlCol="0" anchor="t"/>
+          <a:bodyPr wrap="square" lIns="0" tIns="9700" rIns="0" bIns="-9700" rtlCol="0" anchor="t"/>
           <a:lstStyle/>
           <a:p>
             <a:pPr algn="l" indent="0" marL="0">
               <a:lnSpc>
-                <a:spcPts val="3240"/>
+                <a:spcPts val="3443"/>
               </a:lnSpc>
               <a:buNone/>
             </a:pPr>
             <a:r>
-              <a:rPr lang="en-US" sz="2400" dirty="0" spc="0" kern="0">
+              <a:rPr lang="en-US" sz="2550" dirty="0" spc="1" kern="0">
                 <a:solidFill>
                   <a:srgbClr val="14161C"/>
                 </a:solidFill>
@@ -9084,7 +9051,7 @@
               <a:t>Biến</a:t>
             </a:r>
             <a:r>
-              <a:rPr lang="en-US" sz="2400" dirty="0" spc="2" kern="0">
+              <a:rPr lang="en-US" sz="2550" dirty="0" spc="0" kern="0">
                 <a:solidFill>
                   <a:srgbClr val="14161C"/>
                 </a:solidFill>
@@ -9095,7 +9062,7 @@
               <a:t> môi</a:t>
             </a:r>
             <a:r>
-              <a:rPr lang="en-US" sz="2400" dirty="0" spc="6" kern="0">
+              <a:rPr lang="en-US" sz="2550" dirty="0" spc="5" kern="0">
                 <a:solidFill>
                   <a:srgbClr val="14161C"/>
                 </a:solidFill>
@@ -9106,7 +9073,7 @@
               <a:t> trường</a:t>
             </a:r>
             <a:r>
-              <a:rPr lang="en-US" sz="2400" dirty="0" spc="0" kern="0">
+              <a:rPr lang="en-US" sz="2550" dirty="0" spc="1" kern="0">
                 <a:solidFill>
                   <a:srgbClr val="14161C"/>
                 </a:solidFill>
@@ -9114,10 +9081,10 @@
                 <a:ea typeface="Be Vietnam Pro" pitchFamily="34" charset="-122"/>
                 <a:cs typeface="Be Vietnam Pro" pitchFamily="34" charset="-120"/>
               </a:rPr>
-              <a:t> chỉ có</a:t>
-            </a:r>
-            <a:r>
-              <a:rPr lang="en-US" sz="2400" dirty="0" spc="3" kern="0">
+              <a:t> chỉ</a:t>
+            </a:r>
+            <a:r>
+              <a:rPr lang="en-US" sz="2550" dirty="0" spc="0" kern="0">
                 <a:solidFill>
                   <a:srgbClr val="14161C"/>
                 </a:solidFill>
@@ -9125,10 +9092,10 @@
                 <a:ea typeface="Be Vietnam Pro" pitchFamily="34" charset="-122"/>
                 <a:cs typeface="Be Vietnam Pro" pitchFamily="34" charset="-120"/>
               </a:rPr>
-              <a:t> ở</a:t>
-            </a:r>
-            <a:r>
-              <a:rPr lang="en-US" sz="2400" dirty="0" spc="-3" kern="0">
+              <a:t> có ở</a:t>
+            </a:r>
+            <a:r>
+              <a:rPr lang="en-US" sz="2550" dirty="0" spc="-5" kern="0">
                 <a:solidFill>
                   <a:srgbClr val="14161C"/>
                 </a:solidFill>
@@ -9139,7 +9106,7 @@
               <a:t> một</a:t>
             </a:r>
             <a:r>
-              <a:rPr lang="en-US" sz="2400" dirty="0" spc="-2" kern="0">
+              <a:rPr lang="en-US" sz="2550" dirty="0" spc="-2" kern="0">
                 <a:solidFill>
                   <a:srgbClr val="14161C"/>
                 </a:solidFill>
@@ -9149,7 +9116,7 @@
               </a:rPr>
               <a:t> bên.</a:t>
             </a:r>
-            <a:endParaRPr lang="en-US" sz="2400" dirty="0"/>
+            <a:endParaRPr lang="en-US" sz="2550" dirty="0"/>
           </a:p>
         </p:txBody>
       </p:sp>
@@ -9273,17 +9240,17 @@
           <a:ln/>
         </p:spPr>
         <p:txBody>
-          <a:bodyPr wrap="square" lIns="0" tIns="8557" rIns="0" bIns="-8557" rtlCol="0" anchor="t"/>
+          <a:bodyPr wrap="square" lIns="0" tIns="9700" rIns="0" bIns="-9700" rtlCol="0" anchor="t"/>
           <a:lstStyle/>
           <a:p>
             <a:pPr algn="l" indent="0" marL="0">
               <a:lnSpc>
-                <a:spcPts val="3038"/>
+                <a:spcPts val="3443"/>
               </a:lnSpc>
               <a:buNone/>
             </a:pPr>
             <a:r>
-              <a:rPr lang="en-US" sz="2250" dirty="0" spc="-5" kern="0">
+              <a:rPr lang="en-US" sz="2550" dirty="0" spc="1" kern="0">
                 <a:solidFill>
                   <a:srgbClr val="14161C"/>
                 </a:solidFill>
@@ -9294,7 +9261,7 @@
               <a:t>Nơi</a:t>
             </a:r>
             <a:r>
-              <a:rPr lang="en-US" sz="2250" dirty="0" spc="-2" kern="0">
+              <a:rPr lang="en-US" sz="2550" dirty="0" spc="0" kern="0">
                 <a:solidFill>
                   <a:srgbClr val="14161C"/>
                 </a:solidFill>
@@ -9305,7 +9272,7 @@
               <a:t> khai</a:t>
             </a:r>
             <a:r>
-              <a:rPr lang="en-US" sz="2250" dirty="0" spc="-3" kern="0">
+              <a:rPr lang="en-US" sz="2550" dirty="0" spc="-3" kern="0">
                 <a:solidFill>
                   <a:srgbClr val="14161C"/>
                 </a:solidFill>
@@ -9316,7 +9283,7 @@
               <a:t> báo</a:t>
             </a:r>
             <a:r>
-              <a:rPr lang="en-US" sz="2250" dirty="0" spc="0" kern="0">
+              <a:rPr lang="en-US" sz="2550" dirty="0" spc="-1" kern="0">
                 <a:solidFill>
                   <a:srgbClr val="14161C"/>
                 </a:solidFill>
@@ -9327,7 +9294,7 @@
               <a:t> mọi</a:t>
             </a:r>
             <a:r>
-              <a:rPr lang="en-US" sz="2250" dirty="0" spc="11" kern="0">
+              <a:rPr lang="en-US" sz="2550" dirty="0" spc="15" kern="0">
                 <a:solidFill>
                   <a:srgbClr val="14161C"/>
                 </a:solidFill>
@@ -9338,7 +9305,7 @@
               <a:t> đầu</a:t>
             </a:r>
             <a:r>
-              <a:rPr lang="en-US" sz="2250" dirty="0" spc="-13" kern="0">
+              <a:rPr lang="en-US" sz="2550" dirty="0" spc="-14" kern="0">
                 <a:solidFill>
                   <a:srgbClr val="14161C"/>
                 </a:solidFill>
@@ -9349,7 +9316,7 @@
               <a:t> vào</a:t>
             </a:r>
             <a:r>
-              <a:rPr lang="en-US" sz="2250" dirty="0" spc="2" kern="0">
+              <a:rPr lang="en-US" sz="2550" dirty="0" spc="-1" kern="0">
                 <a:solidFill>
                   <a:srgbClr val="14161C"/>
                 </a:solidFill>
@@ -9360,7 +9327,7 @@
               <a:t> của</a:t>
             </a:r>
             <a:r>
-              <a:rPr lang="en-US" sz="2250" dirty="0" spc="-6" kern="0">
+              <a:rPr lang="en-US" sz="2550" dirty="0" spc="-10" kern="0">
                 <a:solidFill>
                   <a:srgbClr val="14161C"/>
                 </a:solidFill>
@@ -9370,7 +9337,7 @@
               </a:rPr>
               <a:t> job.</a:t>
             </a:r>
-            <a:endParaRPr lang="en-US" sz="2250" dirty="0"/>
+            <a:endParaRPr lang="en-US" sz="2550" dirty="0"/>
           </a:p>
         </p:txBody>
       </p:sp>
@@ -9835,7 +9802,7 @@
               <a:buNone/>
             </a:pPr>
             <a:r>
-              <a:rPr lang="en-US" sz="2250" dirty="0" spc="-2" kern="0">
+              <a:rPr lang="en-US" sz="2550" dirty="0" spc="1" kern="0">
                 <a:solidFill>
                   <a:srgbClr val="14161C"/>
                 </a:solidFill>
@@ -9846,7 +9813,7 @@
               <a:t>Mặc</a:t>
             </a:r>
             <a:r>
-              <a:rPr lang="en-US" sz="2250" dirty="0" spc="14" kern="0">
+              <a:rPr lang="en-US" sz="2550" dirty="0" spc="17" kern="0">
                 <a:solidFill>
                   <a:srgbClr val="14161C"/>
                 </a:solidFill>
@@ -9857,7 +9824,7 @@
               <a:t> định,</a:t>
             </a:r>
             <a:r>
-              <a:rPr lang="en-US" sz="2250" dirty="0" spc="2" kern="0">
+              <a:rPr lang="en-US" sz="2550" dirty="0" spc="1" kern="0">
                 <a:solidFill>
                   <a:srgbClr val="14161C"/>
                 </a:solidFill>
@@ -9868,7 +9835,7 @@
               <a:t> pull</a:t>
             </a:r>
             <a:r>
-              <a:rPr lang="en-US" sz="2250" dirty="0" spc="-15" kern="0">
+              <a:rPr lang="en-US" sz="2550" dirty="0" spc="-16" kern="0">
                 <a:solidFill>
                   <a:srgbClr val="14161C"/>
                 </a:solidFill>
@@ -9879,7 +9846,7 @@
               <a:t> request</a:t>
             </a:r>
             <a:r>
-              <a:rPr lang="en-US" sz="2250" dirty="0" spc="3" kern="0">
+              <a:rPr lang="en-US" sz="2550" dirty="0" spc="-2" kern="0">
                 <a:solidFill>
                   <a:srgbClr val="14161C"/>
                 </a:solidFill>
@@ -9890,7 +9857,7 @@
               <a:t> từ</a:t>
             </a:r>
             <a:r>
-              <a:rPr lang="en-US" sz="2250" dirty="0" spc="-14" kern="0">
+              <a:rPr lang="en-US" sz="2550" dirty="0" spc="-16" kern="0">
                 <a:solidFill>
                   <a:srgbClr val="14161C"/>
                 </a:solidFill>
@@ -9901,7 +9868,7 @@
               <a:t> fork</a:t>
             </a:r>
             <a:r>
-              <a:rPr lang="en-US" sz="2250" dirty="0" spc="1" kern="0">
+              <a:rPr lang="en-US" sz="2550" dirty="0" spc="0" kern="0">
                 <a:solidFill>
                   <a:srgbClr val="14161C"/>
                 </a:solidFill>
@@ -9909,10 +9876,10 @@
                 <a:ea typeface="Be Vietnam Pro" pitchFamily="34" charset="-122"/>
                 <a:cs typeface="Be Vietnam Pro" pitchFamily="34" charset="-120"/>
               </a:rPr>
-              <a:t> không nhận bí</a:t>
-            </a:r>
-            <a:r>
-              <a:rPr lang="en-US" sz="2250" dirty="0" spc="-8" kern="0">
+              <a:t> không nhận</a:t>
+            </a:r>
+            <a:r>
+              <a:rPr lang="en-US" sz="2550" dirty="0" spc="1" kern="0">
                 <a:solidFill>
                   <a:srgbClr val="14161C"/>
                 </a:solidFill>
@@ -9920,9 +9887,20 @@
                 <a:ea typeface="Be Vietnam Pro" pitchFamily="34" charset="-122"/>
                 <a:cs typeface="Be Vietnam Pro" pitchFamily="34" charset="-120"/>
               </a:rPr>
+              <a:t> bí</a:t>
+            </a:r>
+            <a:r>
+              <a:rPr lang="en-US" sz="2550" dirty="0" spc="-8" kern="0">
+                <a:solidFill>
+                  <a:srgbClr val="14161C"/>
+                </a:solidFill>
+                <a:latin typeface="Be Vietnam Pro" pitchFamily="34" charset="0"/>
+                <a:ea typeface="Be Vietnam Pro" pitchFamily="34" charset="-122"/>
+                <a:cs typeface="Be Vietnam Pro" pitchFamily="34" charset="-120"/>
+              </a:rPr>
               <a:t> mật.</a:t>
             </a:r>
-            <a:endParaRPr lang="en-US" sz="2250" dirty="0"/>
+            <a:endParaRPr lang="en-US" sz="2550" dirty="0"/>
           </a:p>
         </p:txBody>
       </p:sp>
@@ -10713,17 +10691,17 @@
           <a:ln/>
         </p:spPr>
         <p:txBody>
-          <a:bodyPr wrap="square" lIns="0" tIns="5001" rIns="0" bIns="-5001" rtlCol="0" anchor="t"/>
+          <a:bodyPr wrap="square" lIns="0" tIns="5667" rIns="0" bIns="-5667" rtlCol="0" anchor="t"/>
           <a:lstStyle/>
           <a:p>
             <a:pPr algn="l" indent="0" marL="0">
               <a:lnSpc>
-                <a:spcPts val="3150"/>
+                <a:spcPts val="3570"/>
               </a:lnSpc>
               <a:buNone/>
             </a:pPr>
             <a:r>
-              <a:rPr lang="en-US" sz="2250" dirty="0" spc="-55" kern="0">
+              <a:rPr lang="en-US" sz="2550" dirty="0" spc="-65" kern="0">
                 <a:solidFill>
                   <a:srgbClr val="14161C"/>
                 </a:solidFill>
@@ -10734,7 +10712,7 @@
               <a:t>Test</a:t>
             </a:r>
             <a:r>
-              <a:rPr lang="en-US" sz="2250" dirty="0" spc="-5" kern="0">
+              <a:rPr lang="en-US" sz="2550" dirty="0" spc="-6" kern="0">
                 <a:solidFill>
                   <a:srgbClr val="14161C"/>
                 </a:solidFill>
@@ -10745,7 +10723,7 @@
               <a:t> sau</a:t>
             </a:r>
             <a:r>
-              <a:rPr lang="en-US" sz="2250" dirty="0" spc="11" kern="0">
+              <a:rPr lang="en-US" sz="2550" dirty="0" spc="8" kern="0">
                 <a:solidFill>
                   <a:srgbClr val="14161C"/>
                 </a:solidFill>
@@ -10756,7 +10734,7 @@
               <a:t> dựa</a:t>
             </a:r>
             <a:r>
-              <a:rPr lang="en-US" sz="2250" dirty="0" spc="-14" kern="0">
+              <a:rPr lang="en-US" sz="2550" dirty="0" spc="-14" kern="0">
                 <a:solidFill>
                   <a:srgbClr val="14161C"/>
                 </a:solidFill>
@@ -10764,10 +10742,10 @@
                 <a:ea typeface="Be Vietnam Pro" pitchFamily="34" charset="-122"/>
                 <a:cs typeface="Be Vietnam Pro" pitchFamily="34" charset="-120"/>
               </a:rPr>
-              <a:t> vào</a:t>
-            </a:r>
-            <a:r>
-              <a:rPr lang="en-US" sz="2250" dirty="0" spc="-12" kern="0">
+              <a:t> vào test</a:t>
+            </a:r>
+            <a:r>
+              <a:rPr lang="en-US" sz="2550" dirty="0" spc="5" kern="0">
                 <a:solidFill>
                   <a:srgbClr val="14161C"/>
                 </a:solidFill>
@@ -10775,20 +10753,9 @@
                 <a:ea typeface="Be Vietnam Pro" pitchFamily="34" charset="-122"/>
                 <a:cs typeface="Be Vietnam Pro" pitchFamily="34" charset="-120"/>
               </a:rPr>
-              <a:t> test</a:t>
-            </a:r>
-            <a:r>
-              <a:rPr lang="en-US" sz="2250" dirty="0" spc="6" kern="0">
-                <a:solidFill>
-                  <a:srgbClr val="14161C"/>
-                </a:solidFill>
-                <a:latin typeface="Be Vietnam Pro" pitchFamily="34" charset="0"/>
-                <a:ea typeface="Be Vietnam Pro" pitchFamily="34" charset="-122"/>
-                <a:cs typeface="Be Vietnam Pro" pitchFamily="34" charset="-120"/>
-              </a:rPr>
               <a:t> trước.</a:t>
             </a:r>
-            <a:endParaRPr lang="en-US" sz="2250" dirty="0"/>
+            <a:endParaRPr lang="en-US" sz="2550" dirty="0"/>
           </a:p>
         </p:txBody>
       </p:sp>
@@ -10912,17 +10879,17 @@
           <a:ln/>
         </p:spPr>
         <p:txBody>
-          <a:bodyPr wrap="square" lIns="0" tIns="5001" rIns="0" bIns="-5001" rtlCol="0" anchor="t"/>
+          <a:bodyPr wrap="square" lIns="0" tIns="5667" rIns="0" bIns="-5667" rtlCol="0" anchor="t"/>
           <a:lstStyle/>
           <a:p>
             <a:pPr algn="l" indent="0" marL="0">
               <a:lnSpc>
-                <a:spcPts val="3150"/>
+                <a:spcPts val="3570"/>
               </a:lnSpc>
               <a:buNone/>
             </a:pPr>
             <a:r>
-              <a:rPr lang="en-US" sz="2250" dirty="0" spc="-15" kern="0">
+              <a:rPr lang="en-US" sz="2550" dirty="0" spc="-12" kern="0">
                 <a:solidFill>
                   <a:srgbClr val="14161C"/>
                 </a:solidFill>
@@ -10933,7 +10900,7 @@
               <a:t>Máy</a:t>
             </a:r>
             <a:r>
-              <a:rPr lang="en-US" sz="2250" dirty="0" spc="-2" kern="0">
+              <a:rPr lang="en-US" sz="2550" dirty="0" spc="-3" kern="0">
                 <a:solidFill>
                   <a:srgbClr val="14161C"/>
                 </a:solidFill>
@@ -10944,7 +10911,7 @@
               <a:t> bạn</a:t>
             </a:r>
             <a:r>
-              <a:rPr lang="en-US" sz="2250" dirty="0" spc="-16" kern="0">
+              <a:rPr lang="en-US" sz="2550" dirty="0" spc="-19" kern="0">
                 <a:solidFill>
                   <a:srgbClr val="14161C"/>
                 </a:solidFill>
@@ -10955,7 +10922,7 @@
               <a:t> và</a:t>
             </a:r>
             <a:r>
-              <a:rPr lang="en-US" sz="2250" dirty="0" spc="-1" kern="0">
+              <a:rPr lang="en-US" sz="2550" dirty="0" spc="1" kern="0">
                 <a:solidFill>
                   <a:srgbClr val="14161C"/>
                 </a:solidFill>
@@ -10966,7 +10933,7 @@
               <a:t> runner</a:t>
             </a:r>
             <a:r>
-              <a:rPr lang="en-US" sz="2250" dirty="0" spc="0" kern="0">
+              <a:rPr lang="en-US" sz="2550" dirty="0" spc="0" kern="0">
                 <a:solidFill>
                   <a:srgbClr val="14161C"/>
                 </a:solidFill>
@@ -10977,7 +10944,7 @@
               <a:t> khác</a:t>
             </a:r>
             <a:r>
-              <a:rPr lang="en-US" sz="2250" dirty="0" spc="2" kern="0">
+              <a:rPr lang="en-US" sz="2550" dirty="0" spc="1" kern="0">
                 <a:solidFill>
                   <a:srgbClr val="14161C"/>
                 </a:solidFill>
@@ -10987,7 +10954,7 @@
               </a:rPr>
               <a:t> giờ.</a:t>
             </a:r>
-            <a:endParaRPr lang="en-US" sz="2250" dirty="0"/>
+            <a:endParaRPr lang="en-US" sz="2550" dirty="0"/>
           </a:p>
         </p:txBody>
       </p:sp>
@@ -11100,17 +11067,17 @@
           <a:ln/>
         </p:spPr>
         <p:txBody>
-          <a:bodyPr wrap="square" lIns="0" tIns="5001" rIns="0" bIns="-5001" rtlCol="0" anchor="t"/>
+          <a:bodyPr wrap="square" lIns="0" tIns="5667" rIns="0" bIns="-5667" rtlCol="0" anchor="t"/>
           <a:lstStyle/>
           <a:p>
             <a:pPr algn="l" indent="0" marL="0">
               <a:lnSpc>
-                <a:spcPts val="3150"/>
+                <a:spcPts val="3570"/>
               </a:lnSpc>
               <a:buNone/>
             </a:pPr>
             <a:r>
-              <a:rPr lang="en-US" sz="2250" dirty="0" spc="-5" kern="0">
+              <a:rPr lang="en-US" sz="2550" dirty="0" spc="-2" kern="0">
                 <a:solidFill>
                   <a:srgbClr val="14161C"/>
                 </a:solidFill>
@@ -11121,7 +11088,7 @@
               <a:t>Hai</a:t>
             </a:r>
             <a:r>
-              <a:rPr lang="en-US" sz="2250" dirty="0" spc="-12" kern="0">
+              <a:rPr lang="en-US" sz="2550" dirty="0" spc="-15" kern="0">
                 <a:solidFill>
                   <a:srgbClr val="14161C"/>
                 </a:solidFill>
@@ -11132,7 +11099,7 @@
               <a:t> test</a:t>
             </a:r>
             <a:r>
-              <a:rPr lang="en-US" sz="2250" dirty="0" spc="-4" kern="0">
+              <a:rPr lang="en-US" sz="2550" dirty="0" spc="-6" kern="0">
                 <a:solidFill>
                   <a:srgbClr val="14161C"/>
                 </a:solidFill>
@@ -11143,7 +11110,7 @@
               <a:t> song song</a:t>
             </a:r>
             <a:r>
-              <a:rPr lang="en-US" sz="2250" dirty="0" spc="-1" kern="0">
+              <a:rPr lang="en-US" sz="2550" dirty="0" spc="0" kern="0">
                 <a:solidFill>
                   <a:srgbClr val="14161C"/>
                 </a:solidFill>
@@ -11154,7 +11121,7 @@
               <a:t> giành</a:t>
             </a:r>
             <a:r>
-              <a:rPr lang="en-US" sz="2250" dirty="0" spc="-4" kern="0">
+              <a:rPr lang="en-US" sz="2550" dirty="0" spc="-5" kern="0">
                 <a:solidFill>
                   <a:srgbClr val="14161C"/>
                 </a:solidFill>
@@ -11165,7 +11132,7 @@
               <a:t> một</a:t>
             </a:r>
             <a:r>
-              <a:rPr lang="en-US" sz="2250" dirty="0" spc="3" kern="0">
+              <a:rPr lang="en-US" sz="2550" dirty="0" spc="1" kern="0">
                 <a:solidFill>
                   <a:srgbClr val="14161C"/>
                 </a:solidFill>
@@ -11175,7 +11142,7 @@
               </a:rPr>
               <a:t> cổng.</a:t>
             </a:r>
-            <a:endParaRPr lang="en-US" sz="2250" dirty="0"/>
+            <a:endParaRPr lang="en-US" sz="2550" dirty="0"/>
           </a:p>
         </p:txBody>
       </p:sp>
@@ -11332,17 +11299,17 @@
           <a:ln/>
         </p:spPr>
         <p:txBody>
-          <a:bodyPr wrap="square" lIns="0" tIns="5001" rIns="0" bIns="-5001" rtlCol="0" anchor="t"/>
+          <a:bodyPr wrap="square" lIns="0" tIns="5667" rIns="0" bIns="-5667" rtlCol="0" anchor="t"/>
           <a:lstStyle/>
           <a:p>
             <a:pPr algn="l" indent="0" marL="0">
               <a:lnSpc>
-                <a:spcPts val="3150"/>
+                <a:spcPts val="3570"/>
               </a:lnSpc>
               <a:buNone/>
             </a:pPr>
             <a:r>
-              <a:rPr lang="en-US" sz="2250" dirty="0" spc="-55" kern="0">
+              <a:rPr lang="en-US" sz="2550" dirty="0" spc="-65" kern="0">
                 <a:solidFill>
                   <a:srgbClr val="14161C"/>
                 </a:solidFill>
@@ -11353,7 +11320,7 @@
               <a:t>Test</a:t>
             </a:r>
             <a:r>
-              <a:rPr lang="en-US" sz="2250" dirty="0" spc="-9" kern="0">
+              <a:rPr lang="en-US" sz="2550" dirty="0" spc="-9" kern="0">
                 <a:solidFill>
                   <a:srgbClr val="14161C"/>
                 </a:solidFill>
@@ -11364,7 +11331,7 @@
               <a:t> này</a:t>
             </a:r>
             <a:r>
-              <a:rPr lang="en-US" sz="2250" dirty="0" spc="13" kern="0">
+              <a:rPr lang="en-US" sz="2550" dirty="0" spc="9" kern="0">
                 <a:solidFill>
                   <a:srgbClr val="14161C"/>
                 </a:solidFill>
@@ -11375,7 +11342,7 @@
               <a:t> đọc</a:t>
             </a:r>
             <a:r>
-              <a:rPr lang="en-US" sz="2250" dirty="0" spc="4" kern="0">
+              <a:rPr lang="en-US" sz="2550" dirty="0" spc="-2" kern="0">
                 <a:solidFill>
                   <a:srgbClr val="14161C"/>
                 </a:solidFill>
@@ -11386,7 +11353,7 @@
               <a:t> dữ</a:t>
             </a:r>
             <a:r>
-              <a:rPr lang="en-US" sz="2250" dirty="0" spc="-2" kern="0">
+              <a:rPr lang="en-US" sz="2550" dirty="0" spc="1" kern="0">
                 <a:solidFill>
                   <a:srgbClr val="14161C"/>
                 </a:solidFill>
@@ -11397,7 +11364,7 @@
               <a:t> liệu</a:t>
             </a:r>
             <a:r>
-              <a:rPr lang="en-US" sz="2250" dirty="0" spc="-11" kern="0">
+              <a:rPr lang="en-US" sz="2550" dirty="0" spc="-14" kern="0">
                 <a:solidFill>
                   <a:srgbClr val="14161C"/>
                 </a:solidFill>
@@ -11408,7 +11375,7 @@
               <a:t> test</a:t>
             </a:r>
             <a:r>
-              <a:rPr lang="en-US" sz="2250" dirty="0" spc="-2" kern="0">
+              <a:rPr lang="en-US" sz="2550" dirty="0" spc="0" kern="0">
                 <a:solidFill>
                   <a:srgbClr val="14161C"/>
                 </a:solidFill>
@@ -11419,7 +11386,7 @@
               <a:t> kia</a:t>
             </a:r>
             <a:r>
-              <a:rPr lang="en-US" sz="2250" dirty="0" spc="0" kern="0">
+              <a:rPr lang="en-US" sz="2550" dirty="0" spc="1" kern="0">
                 <a:solidFill>
                   <a:srgbClr val="14161C"/>
                 </a:solidFill>
@@ -11429,7 +11396,7 @@
               </a:rPr>
               <a:t> ghi.</a:t>
             </a:r>
-            <a:endParaRPr lang="en-US" sz="2250" dirty="0"/>
+            <a:endParaRPr lang="en-US" sz="2550" dirty="0"/>
           </a:p>
         </p:txBody>
       </p:sp>
@@ -11523,19 +11490,19 @@
           <a:ln/>
         </p:spPr>
         <p:txBody>
-          <a:bodyPr wrap="square" lIns="0" tIns="5334" rIns="0" bIns="-5334" rtlCol="0" anchor="t"/>
+          <a:bodyPr wrap="square" lIns="0" tIns="5667" rIns="0" bIns="-5667" rtlCol="0" anchor="t"/>
           <a:lstStyle/>
           <a:p>
-            <a:pPr algn="l" marL="304800" indent="-217761">
+            <a:pPr algn="l" marL="323850" indent="-231371">
               <a:lnSpc>
-                <a:spcPts val="3360"/>
+                <a:spcPts val="3570"/>
               </a:lnSpc>
               <a:buSzPct val="100000"/>
               <a:buFont typeface="Arial"/>
               <a:buChar char="•"/>
             </a:pPr>
             <a:r>
-              <a:rPr lang="en-US" sz="2400" dirty="0" spc="0" kern="0">
+              <a:rPr lang="en-US" sz="2550" dirty="0" spc="0" kern="0">
                 <a:solidFill>
                   <a:srgbClr val="14161C"/>
                 </a:solidFill>
@@ -11543,10 +11510,10 @@
                 <a:ea typeface="Be Vietnam Pro" pitchFamily="34" charset="-122"/>
                 <a:cs typeface="Be Vietnam Pro" pitchFamily="34" charset="-120"/>
               </a:rPr>
-              <a:t>Cho</a:t>
-            </a:r>
-            <a:r>
-              <a:rPr lang="en-US" sz="2400" dirty="0" spc="2" kern="0">
+              <a:t>Cho mỗi</a:t>
+            </a:r>
+            <a:r>
+              <a:rPr lang="en-US" sz="2550" dirty="0" spc="-14" kern="0">
                 <a:solidFill>
                   <a:srgbClr val="14161C"/>
                 </a:solidFill>
@@ -11554,10 +11521,10 @@
                 <a:ea typeface="Be Vietnam Pro" pitchFamily="34" charset="-122"/>
                 <a:cs typeface="Be Vietnam Pro" pitchFamily="34" charset="-120"/>
               </a:rPr>
-              <a:t> mỗi</a:t>
-            </a:r>
-            <a:r>
-              <a:rPr lang="en-US" sz="2400" dirty="0" spc="-15" kern="0">
+              <a:t> test</a:t>
+            </a:r>
+            <a:r>
+              <a:rPr lang="en-US" sz="2550" dirty="0" spc="-2" kern="0">
                 <a:solidFill>
                   <a:srgbClr val="14161C"/>
                 </a:solidFill>
@@ -11565,10 +11532,10 @@
                 <a:ea typeface="Be Vietnam Pro" pitchFamily="34" charset="-122"/>
                 <a:cs typeface="Be Vietnam Pro" pitchFamily="34" charset="-120"/>
               </a:rPr>
-              <a:t> test</a:t>
-            </a:r>
-            <a:r>
-              <a:rPr lang="en-US" sz="2400" dirty="0" spc="4" kern="0">
+              <a:t> tự</a:t>
+            </a:r>
+            <a:r>
+              <a:rPr lang="en-US" sz="2550" dirty="0" spc="19" kern="0">
                 <a:solidFill>
                   <a:srgbClr val="14161C"/>
                 </a:solidFill>
@@ -11576,10 +11543,10 @@
                 <a:ea typeface="Be Vietnam Pro" pitchFamily="34" charset="-122"/>
                 <a:cs typeface="Be Vietnam Pro" pitchFamily="34" charset="-120"/>
               </a:rPr>
-              <a:t> tự</a:t>
-            </a:r>
-            <a:r>
-              <a:rPr lang="en-US" sz="2400" dirty="0" spc="22" kern="0">
+              <a:t> dựng</a:t>
+            </a:r>
+            <a:r>
+              <a:rPr lang="en-US" sz="2550" dirty="0" spc="-1" kern="0">
                 <a:solidFill>
                   <a:srgbClr val="14161C"/>
                 </a:solidFill>
@@ -11587,10 +11554,10 @@
                 <a:ea typeface="Be Vietnam Pro" pitchFamily="34" charset="-122"/>
                 <a:cs typeface="Be Vietnam Pro" pitchFamily="34" charset="-120"/>
               </a:rPr>
-              <a:t> dựng</a:t>
-            </a:r>
-            <a:r>
-              <a:rPr lang="en-US" sz="2400" dirty="0" spc="4" kern="0">
+              <a:t> dữ</a:t>
+            </a:r>
+            <a:r>
+              <a:rPr lang="en-US" sz="2550" dirty="0" spc="1" kern="0">
                 <a:solidFill>
                   <a:srgbClr val="14161C"/>
                 </a:solidFill>
@@ -11598,10 +11565,10 @@
                 <a:ea typeface="Be Vietnam Pro" pitchFamily="34" charset="-122"/>
                 <a:cs typeface="Be Vietnam Pro" pitchFamily="34" charset="-120"/>
               </a:rPr>
-              <a:t> dữ</a:t>
-            </a:r>
-            <a:r>
-              <a:rPr lang="en-US" sz="2400" dirty="0" spc="-1" kern="0">
+              <a:t> liệu</a:t>
+            </a:r>
+            <a:r>
+              <a:rPr lang="en-US" sz="2550" dirty="0" spc="-1" kern="0">
                 <a:solidFill>
                   <a:srgbClr val="14161C"/>
                 </a:solidFill>
@@ -11609,10 +11576,10 @@
                 <a:ea typeface="Be Vietnam Pro" pitchFamily="34" charset="-122"/>
                 <a:cs typeface="Be Vietnam Pro" pitchFamily="34" charset="-120"/>
               </a:rPr>
-              <a:t> liệu</a:t>
-            </a:r>
-            <a:r>
-              <a:rPr lang="en-US" sz="2400" dirty="0" spc="1" kern="0">
+              <a:t> của</a:t>
+            </a:r>
+            <a:r>
+              <a:rPr lang="en-US" sz="2550" dirty="0" spc="0" kern="0">
                 <a:solidFill>
                   <a:srgbClr val="14161C"/>
                 </a:solidFill>
@@ -11620,9 +11587,9 @@
                 <a:ea typeface="Be Vietnam Pro" pitchFamily="34" charset="-122"/>
                 <a:cs typeface="Be Vietnam Pro" pitchFamily="34" charset="-120"/>
               </a:rPr>
-              <a:t> của nó.</a:t>
-            </a:r>
-            <a:endParaRPr lang="en-US" sz="2400" dirty="0"/>
+              <a:t> nó.</a:t>
+            </a:r>
+            <a:endParaRPr lang="en-US" sz="2550" dirty="0"/>
           </a:p>
         </p:txBody>
       </p:sp>
@@ -15209,7 +15176,7 @@
               <a:buNone/>
             </a:pPr>
             <a:r>
-              <a:rPr lang="en-US" sz="2400" dirty="0" spc="3" kern="0">
+              <a:rPr lang="en-US" sz="2550" dirty="0" spc="0" kern="0">
                 <a:solidFill>
                   <a:srgbClr val="E4E1D8"/>
                 </a:solidFill>
@@ -15217,10 +15184,10 @@
                 <a:ea typeface="Be Vietnam Pro" pitchFamily="34" charset="-122"/>
                 <a:cs typeface="Be Vietnam Pro" pitchFamily="34" charset="-120"/>
               </a:rPr>
-              <a:t>npm</a:t>
-            </a:r>
-            <a:r>
-              <a:rPr lang="en-US" sz="2400" dirty="0" spc="-2" kern="0">
+              <a:t>npm ci</a:t>
+            </a:r>
+            <a:r>
+              <a:rPr lang="en-US" sz="2550" dirty="0" spc="-3" kern="0">
                 <a:solidFill>
                   <a:srgbClr val="E4E1D8"/>
                 </a:solidFill>
@@ -15228,10 +15195,10 @@
                 <a:ea typeface="Be Vietnam Pro" pitchFamily="34" charset="-122"/>
                 <a:cs typeface="Be Vietnam Pro" pitchFamily="34" charset="-120"/>
               </a:rPr>
-              <a:t> ci</a:t>
-            </a:r>
-            <a:r>
-              <a:rPr lang="en-US" sz="2400" dirty="0" spc="0" kern="0">
+              <a:t> báo</a:t>
+            </a:r>
+            <a:r>
+              <a:rPr lang="en-US" sz="2550" dirty="0" spc="-1" kern="0">
                 <a:solidFill>
                   <a:srgbClr val="E4E1D8"/>
                 </a:solidFill>
@@ -15239,10 +15206,10 @@
                 <a:ea typeface="Be Vietnam Pro" pitchFamily="34" charset="-122"/>
                 <a:cs typeface="Be Vietnam Pro" pitchFamily="34" charset="-120"/>
               </a:rPr>
-              <a:t> báo lỗi</a:t>
-            </a:r>
-            <a:r>
-              <a:rPr lang="en-US" sz="2400" dirty="0" spc="-2" kern="0">
+              <a:t> lỗi</a:t>
+            </a:r>
+            <a:r>
+              <a:rPr lang="en-US" sz="2550" dirty="0" spc="0" kern="0">
                 <a:solidFill>
                   <a:srgbClr val="E4E1D8"/>
                 </a:solidFill>
@@ -15253,7 +15220,7 @@
               <a:t> khi</a:t>
             </a:r>
             <a:r>
-              <a:rPr lang="en-US" sz="2400" dirty="0" spc="-11" kern="0">
+              <a:rPr lang="en-US" sz="2550" dirty="0" spc="-11" kern="0">
                 <a:solidFill>
                   <a:srgbClr val="E4E1D8"/>
                 </a:solidFill>
@@ -15264,7 +15231,7 @@
               <a:t> tệp</a:t>
             </a:r>
             <a:r>
-              <a:rPr lang="en-US" sz="2400" dirty="0" spc="-2" kern="0">
+              <a:rPr lang="en-US" sz="2550" dirty="0" spc="-3" kern="0">
                 <a:solidFill>
                   <a:srgbClr val="E4E1D8"/>
                 </a:solidFill>
@@ -15275,7 +15242,7 @@
               <a:t> khóa</a:t>
             </a:r>
             <a:r>
-              <a:rPr lang="en-US" sz="2400" dirty="0" spc="1" kern="0">
+              <a:rPr lang="en-US" sz="2550" dirty="0" spc="1" kern="0">
                 <a:solidFill>
                   <a:srgbClr val="E4E1D8"/>
                 </a:solidFill>
@@ -15286,7 +15253,7 @@
               <a:t> không</a:t>
             </a:r>
             <a:r>
-              <a:rPr lang="en-US" sz="2400" dirty="0" spc="0" kern="0">
+              <a:rPr lang="en-US" sz="2550" dirty="0" spc="0" kern="0">
                 <a:solidFill>
                   <a:srgbClr val="E4E1D8"/>
                 </a:solidFill>
@@ -15296,7 +15263,7 @@
               </a:rPr>
               <a:t> khớp.</a:t>
             </a:r>
-            <a:endParaRPr lang="en-US" sz="2400" dirty="0"/>
+            <a:endParaRPr lang="en-US" sz="2550" dirty="0"/>
           </a:p>
         </p:txBody>
       </p:sp>
@@ -15424,7 +15391,7 @@
               <a:buNone/>
             </a:pPr>
             <a:r>
-              <a:rPr lang="en-US" sz="2400" dirty="0" spc="0" kern="0">
+              <a:rPr lang="en-US" sz="2550" dirty="0" spc="1" kern="0">
                 <a:solidFill>
                   <a:srgbClr val="E4E1D8"/>
                 </a:solidFill>
@@ -15435,7 +15402,7 @@
               <a:t>Nhãn</a:t>
             </a:r>
             <a:r>
-              <a:rPr lang="en-US" sz="2400" dirty="0" spc="-15" kern="0">
+              <a:rPr lang="en-US" sz="2550" dirty="0" spc="-15" kern="0">
                 <a:solidFill>
                   <a:srgbClr val="E4E1D8"/>
                 </a:solidFill>
@@ -15446,7 +15413,7 @@
               <a:t> -latest</a:t>
             </a:r>
             <a:r>
-              <a:rPr lang="en-US" sz="2400" dirty="0" spc="0" kern="0">
+              <a:rPr lang="en-US" sz="2550" dirty="0" spc="-1" kern="0">
                 <a:solidFill>
                   <a:srgbClr val="E4E1D8"/>
                 </a:solidFill>
@@ -15454,10 +15421,10 @@
                 <a:ea typeface="Be Vietnam Pro" pitchFamily="34" charset="-122"/>
                 <a:cs typeface="Be Vietnam Pro" pitchFamily="34" charset="-120"/>
               </a:rPr>
-              <a:t> có thể</a:t>
-            </a:r>
-            <a:r>
-              <a:rPr lang="en-US" sz="2400" dirty="0" spc="-21" kern="0">
+              <a:t> có</a:t>
+            </a:r>
+            <a:r>
+              <a:rPr lang="en-US" sz="2550" dirty="0" spc="1" kern="0">
                 <a:solidFill>
                   <a:srgbClr val="E4E1D8"/>
                 </a:solidFill>
@@ -15465,10 +15432,21 @@
                 <a:ea typeface="Be Vietnam Pro" pitchFamily="34" charset="-122"/>
                 <a:cs typeface="Be Vietnam Pro" pitchFamily="34" charset="-120"/>
               </a:rPr>
+              <a:t> thể</a:t>
+            </a:r>
+            <a:r>
+              <a:rPr lang="en-US" sz="2550" dirty="0" spc="-24" kern="0">
+                <a:solidFill>
+                  <a:srgbClr val="E4E1D8"/>
+                </a:solidFill>
+                <a:latin typeface="Be Vietnam Pro" pitchFamily="34" charset="0"/>
+                <a:ea typeface="Be Vietnam Pro" pitchFamily="34" charset="-122"/>
+                <a:cs typeface="Be Vietnam Pro" pitchFamily="34" charset="-120"/>
+              </a:rPr>
               <a:t> trỏ</a:t>
             </a:r>
             <a:r>
-              <a:rPr lang="en-US" sz="2400" dirty="0" spc="-4" kern="0">
+              <a:rPr lang="en-US" sz="2550" dirty="0" spc="-6" kern="0">
                 <a:solidFill>
                   <a:srgbClr val="E4E1D8"/>
                 </a:solidFill>
@@ -15479,7 +15457,7 @@
               <a:t> sang</a:t>
             </a:r>
             <a:r>
-              <a:rPr lang="en-US" sz="2400" dirty="0" spc="0" kern="0">
+              <a:rPr lang="en-US" sz="2550" dirty="0" spc="0" kern="0">
                 <a:solidFill>
                   <a:srgbClr val="E4E1D8"/>
                 </a:solidFill>
@@ -15490,7 +15468,7 @@
               <a:t> hệ</a:t>
             </a:r>
             <a:r>
-              <a:rPr lang="en-US" sz="2400" dirty="0" spc="18" kern="0">
+              <a:rPr lang="en-US" sz="2550" dirty="0" spc="21" kern="0">
                 <a:solidFill>
                   <a:srgbClr val="E4E1D8"/>
                 </a:solidFill>
@@ -15501,7 +15479,7 @@
               <a:t> điều</a:t>
             </a:r>
             <a:r>
-              <a:rPr lang="en-US" sz="2400" dirty="0" spc="1" kern="0">
+              <a:rPr lang="en-US" sz="2550" dirty="0" spc="0" kern="0">
                 <a:solidFill>
                   <a:srgbClr val="E4E1D8"/>
                 </a:solidFill>
@@ -15509,9 +15487,20 @@
                 <a:ea typeface="Be Vietnam Pro" pitchFamily="34" charset="-122"/>
                 <a:cs typeface="Be Vietnam Pro" pitchFamily="34" charset="-120"/>
               </a:rPr>
-              <a:t> hành mới.</a:t>
-            </a:r>
-            <a:endParaRPr lang="en-US" sz="2400" dirty="0"/>
+              <a:t> hành</a:t>
+            </a:r>
+            <a:r>
+              <a:rPr lang="en-US" sz="2550" dirty="0" spc="1" kern="0">
+                <a:solidFill>
+                  <a:srgbClr val="E4E1D8"/>
+                </a:solidFill>
+                <a:latin typeface="Be Vietnam Pro" pitchFamily="34" charset="0"/>
+                <a:ea typeface="Be Vietnam Pro" pitchFamily="34" charset="-122"/>
+                <a:cs typeface="Be Vietnam Pro" pitchFamily="34" charset="-120"/>
+              </a:rPr>
+              <a:t> mới.</a:t>
+            </a:r>
+            <a:endParaRPr lang="en-US" sz="2550" dirty="0"/>
           </a:p>
         </p:txBody>
       </p:sp>
@@ -15650,7 +15639,7 @@
               <a:buNone/>
             </a:pPr>
             <a:r>
-              <a:rPr lang="en-US" sz="2400" dirty="0" spc="0" kern="0">
+              <a:rPr lang="en-US" sz="2550" dirty="0" spc="0" kern="0">
                 <a:solidFill>
                   <a:srgbClr val="E4E1D8"/>
                 </a:solidFill>
@@ -15658,10 +15647,10 @@
                 <a:ea typeface="Be Vietnam Pro" pitchFamily="34" charset="-122"/>
                 <a:cs typeface="Be Vietnam Pro" pitchFamily="34" charset="-120"/>
               </a:rPr>
-              <a:t>Clone</a:t>
-            </a:r>
-            <a:r>
-              <a:rPr lang="en-US" sz="2400" dirty="0" spc="2" kern="0">
+              <a:t>Clone mới ở</a:t>
+            </a:r>
+            <a:r>
+              <a:rPr lang="en-US" sz="2550" dirty="0" spc="-1" kern="0">
                 <a:solidFill>
                   <a:srgbClr val="E4E1D8"/>
                 </a:solidFill>
@@ -15669,10 +15658,10 @@
                 <a:ea typeface="Be Vietnam Pro" pitchFamily="34" charset="-122"/>
                 <a:cs typeface="Be Vietnam Pro" pitchFamily="34" charset="-120"/>
               </a:rPr>
-              <a:t> mới</a:t>
-            </a:r>
-            <a:r>
-              <a:rPr lang="en-US" sz="2400" dirty="0" spc="1" kern="0">
+              <a:t> thư mục</a:t>
+            </a:r>
+            <a:r>
+              <a:rPr lang="en-US" sz="2550" dirty="0" spc="1" kern="0">
                 <a:solidFill>
                   <a:srgbClr val="E4E1D8"/>
                 </a:solidFill>
@@ -15680,10 +15669,10 @@
                 <a:ea typeface="Be Vietnam Pro" pitchFamily="34" charset="-122"/>
                 <a:cs typeface="Be Vietnam Pro" pitchFamily="34" charset="-120"/>
               </a:rPr>
-              <a:t> ở</a:t>
-            </a:r>
-            <a:r>
-              <a:rPr lang="en-US" sz="2400" dirty="0" spc="0" kern="0">
+              <a:t> khác</a:t>
+            </a:r>
+            <a:r>
+              <a:rPr lang="en-US" sz="2550" dirty="0" spc="6" kern="0">
                 <a:solidFill>
                   <a:srgbClr val="E4E1D8"/>
                 </a:solidFill>
@@ -15691,10 +15680,10 @@
                 <a:ea typeface="Be Vietnam Pro" pitchFamily="34" charset="-122"/>
                 <a:cs typeface="Be Vietnam Pro" pitchFamily="34" charset="-120"/>
               </a:rPr>
-              <a:t> thư</a:t>
-            </a:r>
-            <a:r>
-              <a:rPr lang="en-US" sz="2400" dirty="0" spc="2" kern="0">
+              <a:t> trước</a:t>
+            </a:r>
+            <a:r>
+              <a:rPr lang="en-US" sz="2550" dirty="0" spc="0" kern="0">
                 <a:solidFill>
                   <a:srgbClr val="E4E1D8"/>
                 </a:solidFill>
@@ -15702,10 +15691,10 @@
                 <a:ea typeface="Be Vietnam Pro" pitchFamily="34" charset="-122"/>
                 <a:cs typeface="Be Vietnam Pro" pitchFamily="34" charset="-120"/>
               </a:rPr>
-              <a:t> mục</a:t>
-            </a:r>
-            <a:r>
-              <a:rPr lang="en-US" sz="2400" dirty="0" spc="0" kern="0">
+              <a:t> khi</a:t>
+            </a:r>
+            <a:r>
+              <a:rPr lang="en-US" sz="2550" dirty="0" spc="-1" kern="0">
                 <a:solidFill>
                   <a:srgbClr val="E4E1D8"/>
                 </a:solidFill>
@@ -15713,10 +15702,10 @@
                 <a:ea typeface="Be Vietnam Pro" pitchFamily="34" charset="-122"/>
                 <a:cs typeface="Be Vietnam Pro" pitchFamily="34" charset="-120"/>
               </a:rPr>
-              <a:t> khác</a:t>
-            </a:r>
-            <a:r>
-              <a:rPr lang="en-US" sz="2400" dirty="0" spc="6" kern="0">
+              <a:t> nghi</a:t>
+            </a:r>
+            <a:r>
+              <a:rPr lang="en-US" sz="2550" dirty="0" spc="0" kern="0">
                 <a:solidFill>
                   <a:srgbClr val="E4E1D8"/>
                 </a:solidFill>
@@ -15724,42 +15713,9 @@
                 <a:ea typeface="Be Vietnam Pro" pitchFamily="34" charset="-122"/>
                 <a:cs typeface="Be Vietnam Pro" pitchFamily="34" charset="-120"/>
               </a:rPr>
-              <a:t> trước</a:t>
-            </a:r>
-            <a:r>
-              <a:rPr lang="en-US" sz="2400" dirty="0" spc="-2" kern="0">
-                <a:solidFill>
-                  <a:srgbClr val="E4E1D8"/>
-                </a:solidFill>
-                <a:latin typeface="Be Vietnam Pro" pitchFamily="34" charset="0"/>
-                <a:ea typeface="Be Vietnam Pro" pitchFamily="34" charset="-122"/>
-                <a:cs typeface="Be Vietnam Pro" pitchFamily="34" charset="-120"/>
-              </a:rPr>
-              <a:t> khi</a:t>
-            </a:r>
-            <a:r>
-              <a:rPr lang="en-US" sz="2400" dirty="0" spc="0" kern="0">
-                <a:solidFill>
-                  <a:srgbClr val="E4E1D8"/>
-                </a:solidFill>
-                <a:latin typeface="Be Vietnam Pro" pitchFamily="34" charset="0"/>
-                <a:ea typeface="Be Vietnam Pro" pitchFamily="34" charset="-122"/>
-                <a:cs typeface="Be Vietnam Pro" pitchFamily="34" charset="-120"/>
-              </a:rPr>
-              <a:t> nghi</a:t>
-            </a:r>
-            <a:r>
-              <a:rPr lang="en-US" sz="2400" dirty="0" spc="-1" kern="0">
-                <a:solidFill>
-                  <a:srgbClr val="E4E1D8"/>
-                </a:solidFill>
-                <a:latin typeface="Be Vietnam Pro" pitchFamily="34" charset="0"/>
-                <a:ea typeface="Be Vietnam Pro" pitchFamily="34" charset="-122"/>
-                <a:cs typeface="Be Vietnam Pro" pitchFamily="34" charset="-120"/>
-              </a:rPr>
               <a:t> CI.</a:t>
             </a:r>
-            <a:endParaRPr lang="en-US" sz="2400" dirty="0"/>
+            <a:endParaRPr lang="en-US" sz="2550" dirty="0"/>
           </a:p>
         </p:txBody>
       </p:sp>
@@ -15887,7 +15843,7 @@
               <a:buNone/>
             </a:pPr>
             <a:r>
-              <a:rPr lang="en-US" sz="2400" dirty="0" spc="-7" kern="0">
+              <a:rPr lang="en-US" sz="2550" dirty="0" spc="-4" kern="0">
                 <a:solidFill>
                   <a:srgbClr val="E4E1D8"/>
                 </a:solidFill>
@@ -15898,7 +15854,7 @@
               <a:t>Liệt</a:t>
             </a:r>
             <a:r>
-              <a:rPr lang="en-US" sz="2400" dirty="0" spc="-38" kern="0">
+              <a:rPr lang="en-US" sz="2550" dirty="0" spc="-37" kern="0">
                 <a:solidFill>
                   <a:srgbClr val="E4E1D8"/>
                 </a:solidFill>
@@ -15909,7 +15865,7 @@
               <a:t> kê</a:t>
             </a:r>
             <a:r>
-              <a:rPr lang="en-US" sz="2400" dirty="0" spc="2" kern="0">
+              <a:rPr lang="en-US" sz="2550" dirty="0" spc="0" kern="0">
                 <a:solidFill>
                   <a:srgbClr val="E4E1D8"/>
                 </a:solidFill>
@@ -15917,10 +15873,10 @@
                 <a:ea typeface="Be Vietnam Pro" pitchFamily="34" charset="-122"/>
                 <a:cs typeface="Be Vietnam Pro" pitchFamily="34" charset="-120"/>
               </a:rPr>
-              <a:t> mọi</a:t>
-            </a:r>
-            <a:r>
-              <a:rPr lang="en-US" sz="2400" dirty="0" spc="0" kern="0">
+              <a:t> mọi biến</a:t>
+            </a:r>
+            <a:r>
+              <a:rPr lang="en-US" sz="2550" dirty="0" spc="-1" kern="0">
                 <a:solidFill>
                   <a:srgbClr val="E4E1D8"/>
                 </a:solidFill>
@@ -15928,10 +15884,10 @@
                 <a:ea typeface="Be Vietnam Pro" pitchFamily="34" charset="-122"/>
                 <a:cs typeface="Be Vietnam Pro" pitchFamily="34" charset="-120"/>
               </a:rPr>
-              <a:t> biến</a:t>
-            </a:r>
-            <a:r>
-              <a:rPr lang="en-US" sz="2400" dirty="0" spc="1" kern="0">
+              <a:t> môi</a:t>
+            </a:r>
+            <a:r>
+              <a:rPr lang="en-US" sz="2550" dirty="0" spc="5" kern="0">
                 <a:solidFill>
                   <a:srgbClr val="E4E1D8"/>
                 </a:solidFill>
@@ -15939,10 +15895,10 @@
                 <a:ea typeface="Be Vietnam Pro" pitchFamily="34" charset="-122"/>
                 <a:cs typeface="Be Vietnam Pro" pitchFamily="34" charset="-120"/>
               </a:rPr>
-              <a:t> môi</a:t>
-            </a:r>
-            <a:r>
-              <a:rPr lang="en-US" sz="2400" dirty="0" spc="7" kern="0">
+              <a:t> trường</a:t>
+            </a:r>
+            <a:r>
+              <a:rPr lang="en-US" sz="2550" dirty="0" spc="-18" kern="0">
                 <a:solidFill>
                   <a:srgbClr val="E4E1D8"/>
                 </a:solidFill>
@@ -15950,10 +15906,10 @@
                 <a:ea typeface="Be Vietnam Pro" pitchFamily="34" charset="-122"/>
                 <a:cs typeface="Be Vietnam Pro" pitchFamily="34" charset="-120"/>
               </a:rPr>
-              <a:t> trường</a:t>
-            </a:r>
-            <a:r>
-              <a:rPr lang="en-US" sz="2400" dirty="0" spc="-16" kern="0">
+              <a:t> và</a:t>
+            </a:r>
+            <a:r>
+              <a:rPr lang="en-US" sz="2550" dirty="0" spc="1" kern="0">
                 <a:solidFill>
                   <a:srgbClr val="E4E1D8"/>
                 </a:solidFill>
@@ -15961,10 +15917,10 @@
                 <a:ea typeface="Be Vietnam Pro" pitchFamily="34" charset="-122"/>
                 <a:cs typeface="Be Vietnam Pro" pitchFamily="34" charset="-120"/>
               </a:rPr>
-              <a:t> và</a:t>
-            </a:r>
-            <a:r>
-              <a:rPr lang="en-US" sz="2400" dirty="0" spc="1" kern="0">
+              <a:t> bí</a:t>
+            </a:r>
+            <a:r>
+              <a:rPr lang="en-US" sz="2550" dirty="0" spc="-8" kern="0">
                 <a:solidFill>
                   <a:srgbClr val="E4E1D8"/>
                 </a:solidFill>
@@ -15972,20 +15928,9 @@
                 <a:ea typeface="Be Vietnam Pro" pitchFamily="34" charset="-122"/>
                 <a:cs typeface="Be Vietnam Pro" pitchFamily="34" charset="-120"/>
               </a:rPr>
-              <a:t> bí</a:t>
-            </a:r>
-            <a:r>
-              <a:rPr lang="en-US" sz="2400" dirty="0" spc="-7" kern="0">
-                <a:solidFill>
-                  <a:srgbClr val="E4E1D8"/>
-                </a:solidFill>
-                <a:latin typeface="Be Vietnam Pro" pitchFamily="34" charset="0"/>
-                <a:ea typeface="Be Vietnam Pro" pitchFamily="34" charset="-122"/>
-                <a:cs typeface="Be Vietnam Pro" pitchFamily="34" charset="-120"/>
-              </a:rPr>
               <a:t> mật.</a:t>
             </a:r>
-            <a:endParaRPr lang="en-US" sz="2400" dirty="0"/>
+            <a:endParaRPr lang="en-US" sz="2550" dirty="0"/>
           </a:p>
         </p:txBody>
       </p:sp>
@@ -16113,7 +16058,7 @@
               <a:buNone/>
             </a:pPr>
             <a:r>
-              <a:rPr lang="en-US" sz="2400" dirty="0" spc="0" kern="0">
+              <a:rPr lang="en-US" sz="2550" dirty="0" spc="-2" kern="0">
                 <a:solidFill>
                   <a:srgbClr val="E4E1D8"/>
                 </a:solidFill>
@@ -16121,10 +16066,10 @@
                 <a:ea typeface="Be Vietnam Pro" pitchFamily="34" charset="-122"/>
                 <a:cs typeface="Be Vietnam Pro" pitchFamily="34" charset="-120"/>
               </a:rPr>
-              <a:t>Ghi lại</a:t>
-            </a:r>
-            <a:r>
-              <a:rPr lang="en-US" sz="2400" dirty="0" spc="3" kern="0">
+              <a:t>Ghi</a:t>
+            </a:r>
+            <a:r>
+              <a:rPr lang="en-US" sz="2550" dirty="0" spc="0" kern="0">
                 <a:solidFill>
                   <a:srgbClr val="E4E1D8"/>
                 </a:solidFill>
@@ -16132,10 +16077,21 @@
                 <a:ea typeface="Be Vietnam Pro" pitchFamily="34" charset="-122"/>
                 <a:cs typeface="Be Vietnam Pro" pitchFamily="34" charset="-120"/>
               </a:rPr>
+              <a:t> lại</a:t>
+            </a:r>
+            <a:r>
+              <a:rPr lang="en-US" sz="2550" dirty="0" spc="-2" kern="0">
+                <a:solidFill>
+                  <a:srgbClr val="E4E1D8"/>
+                </a:solidFill>
+                <a:latin typeface="Be Vietnam Pro" pitchFamily="34" charset="0"/>
+                <a:ea typeface="Be Vietnam Pro" pitchFamily="34" charset="-122"/>
+                <a:cs typeface="Be Vietnam Pro" pitchFamily="34" charset="-120"/>
+              </a:rPr>
               <a:t> múi</a:t>
             </a:r>
             <a:r>
-              <a:rPr lang="en-US" sz="2400" dirty="0" spc="1" kern="0">
+              <a:rPr lang="en-US" sz="2550" dirty="0" spc="0" kern="0">
                 <a:solidFill>
                   <a:srgbClr val="E4E1D8"/>
                 </a:solidFill>
@@ -16146,7 +16102,7 @@
               <a:t> giờ</a:t>
             </a:r>
             <a:r>
-              <a:rPr lang="en-US" sz="2400" dirty="0" spc="-15" kern="0">
+              <a:rPr lang="en-US" sz="2550" dirty="0" spc="-18" kern="0">
                 <a:solidFill>
                   <a:srgbClr val="E4E1D8"/>
                 </a:solidFill>
@@ -16157,7 +16113,7 @@
               <a:t> và</a:t>
             </a:r>
             <a:r>
-              <a:rPr lang="en-US" sz="2400" dirty="0" spc="-10" kern="0">
+              <a:rPr lang="en-US" sz="2550" dirty="0" spc="-12" kern="0">
                 <a:solidFill>
                   <a:srgbClr val="E4E1D8"/>
                 </a:solidFill>
@@ -16168,7 +16124,7 @@
               <a:t> hạt</a:t>
             </a:r>
             <a:r>
-              <a:rPr lang="en-US" sz="2400" dirty="0" spc="2" kern="0">
+              <a:rPr lang="en-US" sz="2550" dirty="0" spc="0" kern="0">
                 <a:solidFill>
                   <a:srgbClr val="E4E1D8"/>
                 </a:solidFill>
@@ -16179,7 +16135,7 @@
               <a:t> giống</a:t>
             </a:r>
             <a:r>
-              <a:rPr lang="en-US" sz="2400" dirty="0" spc="-8" kern="0">
+              <a:rPr lang="en-US" sz="2550" dirty="0" spc="-8" kern="0">
                 <a:solidFill>
                   <a:srgbClr val="E4E1D8"/>
                 </a:solidFill>
@@ -16190,7 +16146,7 @@
               <a:t> ngẫu</a:t>
             </a:r>
             <a:r>
-              <a:rPr lang="en-US" sz="2400" dirty="0" spc="0" kern="0">
+              <a:rPr lang="en-US" sz="2550" dirty="0" spc="0" kern="0">
                 <a:solidFill>
                   <a:srgbClr val="E4E1D8"/>
                 </a:solidFill>
@@ -16200,7 +16156,7 @@
               </a:rPr>
               <a:t> nhiên.</a:t>
             </a:r>
-            <a:endParaRPr lang="en-US" sz="2400" dirty="0"/>
+            <a:endParaRPr lang="en-US" sz="2550" dirty="0"/>
           </a:p>
         </p:txBody>
       </p:sp>

--- a/system-design-101/vi/lessons/sd-13-014/slides/sd-13-014.pptx
+++ b/system-design-101/vi/lessons/sd-13-014/slides/sd-13-014.pptx
@@ -4640,7 +4640,7 @@
               <a:t> khác</a:t>
             </a:r>
             <a:r>
-              <a:rPr lang="en-US" sz="6900" dirty="0" spc="3" kern="0">
+              <a:rPr lang="en-US" sz="6900" dirty="0" spc="-11" kern="0">
                 <a:solidFill>
                   <a:srgbClr val="14161C"/>
                 </a:solidFill>
@@ -4648,21 +4648,10 @@
                 <a:ea typeface="Bricolage Grotesque ExtraBold" pitchFamily="34" charset="-122"/>
                 <a:cs typeface="Bricolage Grotesque ExtraBold" pitchFamily="34" charset="-120"/>
               </a:rPr>
-              <a:t> nhau</a:t>
-            </a:r>
-            <a:r>
-              <a:rPr lang="en-US" sz="6900" dirty="0" spc="-10" kern="0">
-                <a:solidFill>
-                  <a:srgbClr val="14161C"/>
-                </a:solidFill>
-                <a:latin typeface="Bricolage Grotesque ExtraBold" pitchFamily="34" charset="0"/>
-                <a:ea typeface="Bricolage Grotesque ExtraBold" pitchFamily="34" charset="-122"/>
-                <a:cs typeface="Bricolage Grotesque ExtraBold" pitchFamily="34" charset="-120"/>
-              </a:rPr>
               <a:t> một</a:t>
             </a:r>
             <a:r>
-              <a:rPr lang="en-US" sz="6900" dirty="0" spc="-17" kern="0">
+              <a:rPr lang="en-US" sz="6900" dirty="0" spc="-16" kern="0">
                 <a:solidFill>
                   <a:srgbClr val="14161C"/>
                 </a:solidFill>

--- a/system-design-101/vi/lessons/sd-13-014/slides/sd-13-014.pptx
+++ b/system-design-101/vi/lessons/sd-13-014/slides/sd-13-014.pptx
@@ -7480,7 +7480,7 @@
               <a:buNone/>
             </a:pPr>
             <a:r>
-              <a:rPr lang="en-US" sz="2400" b="1" dirty="0" spc="-2" kern="0">
+              <a:rPr lang="en-US" sz="2550" b="1" dirty="0" spc="2" kern="0">
                 <a:solidFill>
                   <a:srgbClr val="F3EEE3"/>
                 </a:solidFill>
@@ -7490,7 +7490,7 @@
               </a:rPr>
               <a:t>Cache</a:t>
             </a:r>
-            <a:endParaRPr lang="en-US" sz="2400" dirty="0"/>
+            <a:endParaRPr lang="en-US" sz="2550" dirty="0"/>
           </a:p>
         </p:txBody>
       </p:sp>
@@ -7528,7 +7528,7 @@
               <a:buNone/>
             </a:pPr>
             <a:r>
-              <a:rPr lang="en-US" sz="2400" b="1" dirty="0" spc="-88" kern="0">
+              <a:rPr lang="en-US" sz="2550" b="1" dirty="0" spc="-91" kern="0">
                 <a:solidFill>
                   <a:srgbClr val="F3EEE3"/>
                 </a:solidFill>
@@ -7539,7 +7539,7 @@
               <a:t>Tệp</a:t>
             </a:r>
             <a:r>
-              <a:rPr lang="en-US" sz="2400" b="1" dirty="0" spc="-1" kern="0">
+              <a:rPr lang="en-US" sz="2550" b="1" dirty="0" spc="0" kern="0">
                 <a:solidFill>
                   <a:srgbClr val="F3EEE3"/>
                 </a:solidFill>
@@ -7550,7 +7550,7 @@
               <a:t> sinh</a:t>
             </a:r>
             <a:r>
-              <a:rPr lang="en-US" sz="2400" b="1" dirty="0" spc="-14" kern="0">
+              <a:rPr lang="en-US" sz="2550" b="1" dirty="0" spc="-20" kern="0">
                 <a:solidFill>
                   <a:srgbClr val="F3EEE3"/>
                 </a:solidFill>
@@ -7560,7 +7560,7 @@
               </a:rPr>
               <a:t> ra</a:t>
             </a:r>
-            <a:endParaRPr lang="en-US" sz="2400" dirty="0"/>
+            <a:endParaRPr lang="en-US" sz="2550" dirty="0"/>
           </a:p>
         </p:txBody>
       </p:sp>
@@ -7598,7 +7598,7 @@
               <a:buNone/>
             </a:pPr>
             <a:r>
-              <a:rPr lang="en-US" sz="2400" b="1" dirty="0" spc="-1" kern="0">
+              <a:rPr lang="en-US" sz="2550" b="1" dirty="0" spc="0" kern="0">
                 <a:solidFill>
                   <a:srgbClr val="F3EEE3"/>
                 </a:solidFill>
@@ -7609,7 +7609,7 @@
               <a:t>Dịch</a:t>
             </a:r>
             <a:r>
-              <a:rPr lang="en-US" sz="2400" b="1" dirty="0" spc="3" kern="0">
+              <a:rPr lang="en-US" sz="2550" b="1" dirty="0" spc="-1" kern="0">
                 <a:solidFill>
                   <a:srgbClr val="F3EEE3"/>
                 </a:solidFill>
@@ -7620,7 +7620,7 @@
               <a:t> vụ</a:t>
             </a:r>
             <a:r>
-              <a:rPr lang="en-US" sz="2400" b="1" dirty="0" spc="-9" kern="0">
+              <a:rPr lang="en-US" sz="2550" b="1" dirty="0" spc="-7" kern="0">
                 <a:solidFill>
                   <a:srgbClr val="F3EEE3"/>
                 </a:solidFill>
@@ -7630,7 +7630,7 @@
               </a:rPr>
               <a:t> nền</a:t>
             </a:r>
-            <a:endParaRPr lang="en-US" sz="2400" dirty="0"/>
+            <a:endParaRPr lang="en-US" sz="2550" dirty="0"/>
           </a:p>
         </p:txBody>
       </p:sp>

--- a/system-design-101/vi/lessons/sd-13-014/slides/sd-13-014.pptx
+++ b/system-design-101/vi/lessons/sd-13-014/slides/sd-13-014.pptx
@@ -13487,12 +13487,12 @@
                     <a:p>
                       <a:pPr algn="l" indent="0" marL="0">
                         <a:lnSpc>
-                          <a:spcPts val="2880"/>
+                          <a:spcPts val="3060"/>
                         </a:lnSpc>
                         <a:buNone/>
                       </a:pPr>
                       <a:r>
-                        <a:rPr lang="en-US" sz="2400" b="1" dirty="0" spc="-13" kern="0">
+                        <a:rPr lang="en-US" sz="2550" b="1" dirty="0" spc="-15" kern="0">
                           <a:solidFill>
                             <a:srgbClr val="14161C"/>
                           </a:solidFill>
@@ -13503,7 +13503,7 @@
                         <a:t>Máy</a:t>
                       </a:r>
                       <a:r>
-                        <a:rPr lang="en-US" sz="2400" b="1" dirty="0" spc="-9" kern="0">
+                        <a:rPr lang="en-US" sz="2550" b="1" dirty="0" spc="-8" kern="0">
                           <a:solidFill>
                             <a:srgbClr val="14161C"/>
                           </a:solidFill>
@@ -13511,12 +13511,23 @@
                           <a:ea typeface="Be Vietnam Pro" pitchFamily="34" charset="-122"/>
                           <a:cs typeface="Be Vietnam Pro" pitchFamily="34" charset="-120"/>
                         </a:rPr>
-                        <a:t> chạy test</a:t>
+                        <a:t> chạy</a:t>
+                      </a:r>
+                      <a:r>
+                        <a:rPr lang="en-US" sz="2550" b="1" dirty="0" spc="-9" kern="0">
+                          <a:solidFill>
+                            <a:srgbClr val="14161C"/>
+                          </a:solidFill>
+                          <a:latin typeface="Be Vietnam Pro" pitchFamily="34" charset="0"/>
+                          <a:ea typeface="Be Vietnam Pro" pitchFamily="34" charset="-122"/>
+                          <a:cs typeface="Be Vietnam Pro" pitchFamily="34" charset="-120"/>
+                        </a:rPr>
+                        <a:t> test</a:t>
                       </a:r>
                       <a:endParaRPr lang="en-US" sz="1200" dirty="0"/>
                     </a:p>
                   </a:txBody>
-                  <a:tcPr marL="304800" marR="304800" marT="293370" marB="293370" anchor="ctr">
+                  <a:tcPr marL="304800" marR="304800" marT="281940" marB="281940" anchor="ctr">
                     <a:lnL w="0" cap="flat" cmpd="sng" algn="ctr">
                       <a:noFill/>
                     </a:lnL>
@@ -13541,12 +13552,12 @@
                     <a:p>
                       <a:pPr algn="l" indent="0" marL="0">
                         <a:lnSpc>
-                          <a:spcPts val="2880"/>
+                          <a:spcPts val="3060"/>
                         </a:lnSpc>
                         <a:buNone/>
                       </a:pPr>
                       <a:r>
-                        <a:rPr lang="en-US" sz="2400" b="1" dirty="0" spc="-12" kern="0">
+                        <a:rPr lang="en-US" sz="2550" b="1" dirty="0" spc="-5" kern="0">
                           <a:solidFill>
                             <a:srgbClr val="14161C"/>
                           </a:solidFill>
@@ -13557,7 +13568,7 @@
                         <a:t>Hệ</a:t>
                       </a:r>
                       <a:r>
-                        <a:rPr lang="en-US" sz="2400" b="1" dirty="0" spc="-8" kern="0">
+                        <a:rPr lang="en-US" sz="2550" b="1" dirty="0" spc="-7" kern="0">
                           <a:solidFill>
                             <a:srgbClr val="14161C"/>
                           </a:solidFill>
@@ -13568,7 +13579,7 @@
                         <a:t> tệp</a:t>
                       </a:r>
                       <a:r>
-                        <a:rPr lang="en-US" sz="2400" b="1" dirty="0" spc="-4" kern="0">
+                        <a:rPr lang="en-US" sz="2550" b="1" dirty="0" spc="-3" kern="0">
                           <a:solidFill>
                             <a:srgbClr val="14161C"/>
                           </a:solidFill>
@@ -13579,7 +13590,7 @@
                         <a:t> phân biệt</a:t>
                       </a:r>
                       <a:r>
-                        <a:rPr lang="en-US" sz="2400" b="1" dirty="0" spc="-5" kern="0">
+                        <a:rPr lang="en-US" sz="2550" b="1" dirty="0" spc="-6" kern="0">
                           <a:solidFill>
                             <a:srgbClr val="14161C"/>
                           </a:solidFill>
@@ -13590,7 +13601,7 @@
                         <a:t> hoa</a:t>
                       </a:r>
                       <a:r>
-                        <a:rPr lang="en-US" sz="2400" b="1" dirty="0" spc="4" kern="0">
+                        <a:rPr lang="en-US" sz="2550" b="1" dirty="0" spc="6" kern="0">
                           <a:solidFill>
                             <a:srgbClr val="14161C"/>
                           </a:solidFill>
@@ -13603,7 +13614,7 @@
                       <a:endParaRPr lang="en-US" sz="1200" dirty="0"/>
                     </a:p>
                   </a:txBody>
-                  <a:tcPr marL="304800" marR="304800" marT="293370" marB="293370" anchor="ctr">
+                  <a:tcPr marL="304800" marR="304800" marT="281940" marB="281940" anchor="ctr">
                     <a:lnL w="19050" cap="flat" cmpd="sng" algn="ctr">
                       <a:solidFill>
                         <a:srgbClr val="DDD5C1"/>
@@ -13634,12 +13645,12 @@
                     <a:p>
                       <a:pPr algn="l" indent="0" marL="0">
                         <a:lnSpc>
-                          <a:spcPts val="2880"/>
+                          <a:spcPts val="3060"/>
                         </a:lnSpc>
                         <a:buNone/>
                       </a:pPr>
                       <a:r>
-                        <a:rPr lang="en-US" sz="2400" b="1" dirty="0" spc="-42" kern="0">
+                        <a:rPr lang="en-US" sz="2550" b="1" dirty="0" spc="-44" kern="0">
                           <a:solidFill>
                             <a:srgbClr val="14161C"/>
                           </a:solidFill>
@@ -13650,7 +13661,7 @@
                         <a:t>Kết</a:t>
                       </a:r>
                       <a:r>
-                        <a:rPr lang="en-US" sz="2400" b="1" dirty="0" spc="2" kern="0">
+                        <a:rPr lang="en-US" sz="2550" b="1" dirty="0" spc="1" kern="0">
                           <a:solidFill>
                             <a:srgbClr val="14161C"/>
                           </a:solidFill>
@@ -13663,7 +13674,7 @@
                       <a:endParaRPr lang="en-US" sz="1200" dirty="0"/>
                     </a:p>
                   </a:txBody>
-                  <a:tcPr marL="304800" marR="304800" marT="293370" marB="293370" anchor="ctr">
+                  <a:tcPr marL="304800" marR="304800" marT="281940" marB="281940" anchor="ctr">
                     <a:lnL w="19050" cap="flat" cmpd="sng" algn="ctr">
                       <a:solidFill>
                         <a:srgbClr val="DDD5C1"/>
@@ -13696,12 +13707,12 @@
                     <a:p>
                       <a:pPr algn="l" indent="0" marL="0">
                         <a:lnSpc>
-                          <a:spcPts val="2880"/>
+                          <a:spcPts val="3060"/>
                         </a:lnSpc>
                         <a:buNone/>
                       </a:pPr>
                       <a:r>
-                        <a:rPr lang="en-US" sz="2400" dirty="0" kern="0">
+                        <a:rPr lang="en-US" sz="2550" dirty="0" spc="-2" kern="0">
                           <a:solidFill>
                             <a:srgbClr val="14161C"/>
                           </a:solidFill>
@@ -13714,7 +13725,7 @@
                       <a:endParaRPr lang="en-US" sz="1200" dirty="0"/>
                     </a:p>
                   </a:txBody>
-                  <a:tcPr marL="304800" marR="304800" marT="293370" marB="293370" anchor="ctr">
+                  <a:tcPr marL="304800" marR="304800" marT="281940" marB="281940" anchor="ctr">
                     <a:lnL w="0" cap="flat" cmpd="sng" algn="ctr">
                       <a:noFill/>
                     </a:lnL>
@@ -13745,12 +13756,12 @@
                     <a:p>
                       <a:pPr algn="l" indent="0" marL="0">
                         <a:lnSpc>
-                          <a:spcPts val="2880"/>
+                          <a:spcPts val="3060"/>
                         </a:lnSpc>
                         <a:buNone/>
                       </a:pPr>
                       <a:r>
-                        <a:rPr lang="en-US" sz="2400" dirty="0" spc="6" kern="0">
+                        <a:rPr lang="en-US" sz="2550" dirty="0" spc="5" kern="0">
                           <a:solidFill>
                             <a:srgbClr val="14161C"/>
                           </a:solidFill>
@@ -13761,7 +13772,7 @@
                         <a:t>Thường</a:t>
                       </a:r>
                       <a:r>
-                        <a:rPr lang="en-US" sz="2400" dirty="0" spc="2" kern="0">
+                        <a:rPr lang="en-US" sz="2550" dirty="0" spc="0" kern="0">
                           <a:solidFill>
                             <a:srgbClr val="14161C"/>
                           </a:solidFill>
@@ -13772,7 +13783,7 @@
                         <a:t> mặc</a:t>
                       </a:r>
                       <a:r>
-                        <a:rPr lang="en-US" sz="2400" dirty="0" spc="20" kern="0">
+                        <a:rPr lang="en-US" sz="2550" dirty="0" spc="21" kern="0">
                           <a:solidFill>
                             <a:srgbClr val="14161C"/>
                           </a:solidFill>
@@ -13783,7 +13794,7 @@
                         <a:t> định</a:t>
                       </a:r>
                       <a:r>
-                        <a:rPr lang="en-US" sz="2400" dirty="0" spc="0" kern="0">
+                        <a:rPr lang="en-US" sz="2550" dirty="0" spc="0" kern="0">
                           <a:solidFill>
                             <a:srgbClr val="14161C"/>
                           </a:solidFill>
@@ -13796,7 +13807,7 @@
                       <a:endParaRPr lang="en-US" sz="1200" dirty="0"/>
                     </a:p>
                   </a:txBody>
-                  <a:tcPr marL="304800" marR="304800" marT="293370" marB="293370" anchor="ctr">
+                  <a:tcPr marL="304800" marR="304800" marT="281940" marB="281940" anchor="ctr">
                     <a:lnL w="19050" cap="flat" cmpd="sng" algn="ctr">
                       <a:solidFill>
                         <a:srgbClr val="DDD5C1"/>
@@ -13833,12 +13844,12 @@
                     <a:p>
                       <a:pPr algn="l" indent="0" marL="0">
                         <a:lnSpc>
-                          <a:spcPts val="2880"/>
+                          <a:spcPts val="3060"/>
                         </a:lnSpc>
                         <a:buNone/>
                       </a:pPr>
                       <a:r>
-                        <a:rPr lang="en-US" sz="2400" dirty="0" spc="-62" kern="0">
+                        <a:rPr lang="en-US" sz="2550" dirty="0" spc="-65" kern="0">
                           <a:solidFill>
                             <a:srgbClr val="14161C"/>
                           </a:solidFill>
@@ -13849,7 +13860,7 @@
                         <a:t>Test</a:t>
                       </a:r>
                       <a:r>
-                        <a:rPr lang="en-US" sz="2400" dirty="0" spc="1" kern="0">
+                        <a:rPr lang="en-US" sz="2550" dirty="0" spc="2" kern="0">
                           <a:solidFill>
                             <a:srgbClr val="14161C"/>
                           </a:solidFill>
@@ -13862,7 +13873,7 @@
                       <a:endParaRPr lang="en-US" sz="1200" dirty="0"/>
                     </a:p>
                   </a:txBody>
-                  <a:tcPr marL="304800" marR="304800" marT="293370" marB="293370" anchor="ctr">
+                  <a:tcPr marL="304800" marR="304800" marT="281940" marB="281940" anchor="ctr">
                     <a:lnL w="19050" cap="flat" cmpd="sng" algn="ctr">
                       <a:solidFill>
                         <a:srgbClr val="DDD5C1"/>
@@ -13901,12 +13912,12 @@
                     <a:p>
                       <a:pPr algn="l" indent="0" marL="0">
                         <a:lnSpc>
-                          <a:spcPts val="2880"/>
+                          <a:spcPts val="3060"/>
                         </a:lnSpc>
                         <a:buNone/>
                       </a:pPr>
                       <a:r>
-                        <a:rPr lang="en-US" sz="2400" dirty="0" spc="-11" kern="0">
+                        <a:rPr lang="en-US" sz="2550" dirty="0" spc="-11" kern="0">
                           <a:solidFill>
                             <a:srgbClr val="14161C"/>
                           </a:solidFill>
@@ -13919,7 +13930,7 @@
                       <a:endParaRPr lang="en-US" sz="1200" dirty="0"/>
                     </a:p>
                   </a:txBody>
-                  <a:tcPr marL="304800" marR="304800" marT="293370" marB="293370" anchor="ctr">
+                  <a:tcPr marL="304800" marR="304800" marT="281940" marB="281940" anchor="ctr">
                     <a:lnL w="0" cap="flat" cmpd="sng" algn="ctr">
                       <a:noFill/>
                     </a:lnL>
@@ -13950,12 +13961,12 @@
                     <a:p>
                       <a:pPr algn="l" indent="0" marL="0">
                         <a:lnSpc>
-                          <a:spcPts val="2880"/>
+                          <a:spcPts val="3060"/>
                         </a:lnSpc>
                         <a:buNone/>
                       </a:pPr>
                       <a:r>
-                        <a:rPr lang="en-US" sz="2400" dirty="0" spc="6" kern="0">
+                        <a:rPr lang="en-US" sz="2550" dirty="0" spc="5" kern="0">
                           <a:solidFill>
                             <a:srgbClr val="14161C"/>
                           </a:solidFill>
@@ -13966,7 +13977,7 @@
                         <a:t>Thường</a:t>
                       </a:r>
                       <a:r>
-                        <a:rPr lang="en-US" sz="2400" dirty="0" spc="2" kern="0">
+                        <a:rPr lang="en-US" sz="2550" dirty="0" spc="0" kern="0">
                           <a:solidFill>
                             <a:srgbClr val="14161C"/>
                           </a:solidFill>
@@ -13977,7 +13988,7 @@
                         <a:t> mặc</a:t>
                       </a:r>
                       <a:r>
-                        <a:rPr lang="en-US" sz="2400" dirty="0" spc="20" kern="0">
+                        <a:rPr lang="en-US" sz="2550" dirty="0" spc="21" kern="0">
                           <a:solidFill>
                             <a:srgbClr val="14161C"/>
                           </a:solidFill>
@@ -13988,7 +13999,7 @@
                         <a:t> định</a:t>
                       </a:r>
                       <a:r>
-                        <a:rPr lang="en-US" sz="2400" dirty="0" spc="0" kern="0">
+                        <a:rPr lang="en-US" sz="2550" dirty="0" spc="0" kern="0">
                           <a:solidFill>
                             <a:srgbClr val="14161C"/>
                           </a:solidFill>
@@ -14001,7 +14012,7 @@
                       <a:endParaRPr lang="en-US" sz="1200" dirty="0"/>
                     </a:p>
                   </a:txBody>
-                  <a:tcPr marL="304800" marR="304800" marT="293370" marB="293370" anchor="ctr">
+                  <a:tcPr marL="304800" marR="304800" marT="281940" marB="281940" anchor="ctr">
                     <a:lnL w="19050" cap="flat" cmpd="sng" algn="ctr">
                       <a:solidFill>
                         <a:srgbClr val="DDD5C1"/>
@@ -14038,12 +14049,12 @@
                     <a:p>
                       <a:pPr algn="l" indent="0" marL="0">
                         <a:lnSpc>
-                          <a:spcPts val="2880"/>
+                          <a:spcPts val="3060"/>
                         </a:lnSpc>
                         <a:buNone/>
                       </a:pPr>
                       <a:r>
-                        <a:rPr lang="en-US" sz="2400" dirty="0" spc="-62" kern="0">
+                        <a:rPr lang="en-US" sz="2550" dirty="0" spc="-65" kern="0">
                           <a:solidFill>
                             <a:srgbClr val="14161C"/>
                           </a:solidFill>
@@ -14054,7 +14065,7 @@
                         <a:t>Test</a:t>
                       </a:r>
                       <a:r>
-                        <a:rPr lang="en-US" sz="2400" dirty="0" spc="1" kern="0">
+                        <a:rPr lang="en-US" sz="2550" dirty="0" spc="2" kern="0">
                           <a:solidFill>
                             <a:srgbClr val="14161C"/>
                           </a:solidFill>
@@ -14067,7 +14078,7 @@
                       <a:endParaRPr lang="en-US" sz="1200" dirty="0"/>
                     </a:p>
                   </a:txBody>
-                  <a:tcPr marL="304800" marR="304800" marT="293370" marB="293370" anchor="ctr">
+                  <a:tcPr marL="304800" marR="304800" marT="281940" marB="281940" anchor="ctr">
                     <a:lnL w="19050" cap="flat" cmpd="sng" algn="ctr">
                       <a:solidFill>
                         <a:srgbClr val="DDD5C1"/>
@@ -14106,12 +14117,12 @@
                     <a:p>
                       <a:pPr algn="l" indent="0" marL="0">
                         <a:lnSpc>
-                          <a:spcPts val="2880"/>
+                          <a:spcPts val="3060"/>
                         </a:lnSpc>
                         <a:buNone/>
                       </a:pPr>
                       <a:r>
-                        <a:rPr lang="en-US" sz="2400" dirty="0" spc="-20" kern="0">
+                        <a:rPr lang="en-US" sz="2550" dirty="0" spc="-20" kern="0">
                           <a:solidFill>
                             <a:srgbClr val="14161C"/>
                           </a:solidFill>
@@ -14122,7 +14133,7 @@
                         <a:t>Runner</a:t>
                       </a:r>
                       <a:r>
-                        <a:rPr lang="en-US" sz="2400" dirty="0" spc="0" kern="0">
+                        <a:rPr lang="en-US" sz="2550" dirty="0" spc="1" kern="0">
                           <a:solidFill>
                             <a:srgbClr val="14161C"/>
                           </a:solidFill>
@@ -14135,7 +14146,7 @@
                       <a:endParaRPr lang="en-US" sz="1200" dirty="0"/>
                     </a:p>
                   </a:txBody>
-                  <a:tcPr marL="304800" marR="304800" marT="293370" marB="293370" anchor="ctr">
+                  <a:tcPr marL="304800" marR="304800" marT="281940" marB="281940" anchor="ctr">
                     <a:lnL w="0" cap="flat" cmpd="sng" algn="ctr">
                       <a:noFill/>
                     </a:lnL>
@@ -14166,12 +14177,12 @@
                     <a:p>
                       <a:pPr algn="l" indent="0" marL="0">
                         <a:lnSpc>
-                          <a:spcPts val="2880"/>
+                          <a:spcPts val="3060"/>
                         </a:lnSpc>
                         <a:buNone/>
                       </a:pPr>
                       <a:r>
-                        <a:rPr lang="en-US" sz="2400" dirty="0" kern="0">
+                        <a:rPr lang="en-US" sz="2550" dirty="0" spc="1" kern="0">
                           <a:solidFill>
                             <a:srgbClr val="14161C"/>
                           </a:solidFill>
@@ -14184,7 +14195,7 @@
                       <a:endParaRPr lang="en-US" sz="1200" dirty="0"/>
                     </a:p>
                   </a:txBody>
-                  <a:tcPr marL="304800" marR="304800" marT="293370" marB="293370" anchor="ctr">
+                  <a:tcPr marL="304800" marR="304800" marT="281940" marB="281940" anchor="ctr">
                     <a:lnL w="19050" cap="flat" cmpd="sng" algn="ctr">
                       <a:solidFill>
                         <a:srgbClr val="DDD5C1"/>
@@ -14221,12 +14232,12 @@
                     <a:p>
                       <a:pPr algn="l" indent="0" marL="0">
                         <a:lnSpc>
-                          <a:spcPts val="2880"/>
+                          <a:spcPts val="3060"/>
                         </a:lnSpc>
                         <a:buNone/>
                       </a:pPr>
                       <a:r>
-                        <a:rPr lang="en-US" sz="2400" dirty="0" spc="2" kern="0">
+                        <a:rPr lang="en-US" sz="2550" dirty="0" spc="-1" kern="0">
                           <a:solidFill>
                             <a:srgbClr val="14161C"/>
                           </a:solidFill>
@@ -14237,7 +14248,7 @@
                         <a:t>Không</a:t>
                       </a:r>
                       <a:r>
-                        <a:rPr lang="en-US" sz="2400" dirty="0" spc="3" kern="0">
+                        <a:rPr lang="en-US" sz="2550" dirty="0" spc="2" kern="0">
                           <a:solidFill>
                             <a:srgbClr val="14161C"/>
                           </a:solidFill>
@@ -14248,7 +14259,7 @@
                         <a:t> tìm</a:t>
                       </a:r>
                       <a:r>
-                        <a:rPr lang="en-US" sz="2400" dirty="0" spc="-6" kern="0">
+                        <a:rPr lang="en-US" sz="2550" dirty="0" spc="-7" kern="0">
                           <a:solidFill>
                             <a:srgbClr val="14161C"/>
                           </a:solidFill>
@@ -14259,7 +14270,7 @@
                         <a:t> thấy</a:t>
                       </a:r>
                       <a:r>
-                        <a:rPr lang="en-US" sz="2400" dirty="0" spc="-10" kern="0">
+                        <a:rPr lang="en-US" sz="2550" dirty="0" spc="-11" kern="0">
                           <a:solidFill>
                             <a:srgbClr val="14161C"/>
                           </a:solidFill>
@@ -14272,7 +14283,7 @@
                       <a:endParaRPr lang="en-US" sz="1200" dirty="0"/>
                     </a:p>
                   </a:txBody>
-                  <a:tcPr marL="304800" marR="304800" marT="293370" marB="293370" anchor="ctr">
+                  <a:tcPr marL="304800" marR="304800" marT="281940" marB="281940" anchor="ctr">
                     <a:lnL w="19050" cap="flat" cmpd="sng" algn="ctr">
                       <a:solidFill>
                         <a:srgbClr val="DDD5C1"/>
